--- a/exports/pptx/lessons/senior-module-01-what-is-iks/day-03-darshanas.pptx
+++ b/exports/pptx/lessons/senior-module-01-what-is-iks/day-03-darshanas.pptx
@@ -2977,7 +2977,741 @@
         </p:nvSpPr>
         <p:spPr>
           <a:xfrm>
-            <a:off x="406301" y="3877419"/>
+            <a:off x="406301" y="1160413"/>
+            <a:ext cx="8498026" cy="213271"/>
+          </a:xfrm>
+          <a:prstGeom prst="rect">
+            <a:avLst/>
+          </a:prstGeom>
+          <a:noFill/>
+          <a:ln/>
+        </p:spPr>
+        <p:txBody>
+          <a:bodyPr wrap="square" lIns="0" tIns="0" rIns="0" bIns="0" rtlCol="0" anchor="t"/>
+          <a:lstStyle/>
+          <a:p>
+            <a:pPr algn="l" indent="0" marL="0">
+              <a:lnSpc>
+                <a:spcPts val="1680"/>
+              </a:lnSpc>
+              <a:spcBef>
+                <a:spcPts val="300"/>
+              </a:spcBef>
+              <a:spcAft>
+                <a:spcPts val="300"/>
+              </a:spcAft>
+              <a:buNone/>
+            </a:pPr>
+            <a:r>
+              <a:rPr lang="en-US" sz="1200" i="1" dirty="0">
+                <a:solidFill>
+                  <a:srgbClr val="1A1A1A"/>
+                </a:solidFill>
+                <a:latin typeface="Georgia" pitchFamily="34" charset="0"/>
+                <a:ea typeface="Georgia" pitchFamily="34" charset="-122"/>
+                <a:cs typeface="Georgia" pitchFamily="34" charset="-120"/>
+              </a:rPr>
+              <a:t>Each row: # · Sanskrit · Central question · Founder/text.</a:t>
+            </a:r>
+            <a:endParaRPr lang="en-US" sz="1200" dirty="0"/>
+          </a:p>
+        </p:txBody>
+      </p:sp>
+      <p:sp>
+        <p:nvSpPr>
+          <p:cNvPr id="6" name="Text 4"/>
+          <p:cNvSpPr/>
+          <p:nvPr/>
+        </p:nvSpPr>
+        <p:spPr>
+          <a:xfrm>
+            <a:off x="634901" y="1462534"/>
+            <a:ext cx="8102798" cy="1706463"/>
+          </a:xfrm>
+          <a:prstGeom prst="rect">
+            <a:avLst/>
+          </a:prstGeom>
+          <a:noFill/>
+          <a:ln/>
+        </p:spPr>
+        <p:txBody>
+          <a:bodyPr wrap="square" lIns="0" tIns="0" rIns="0" bIns="0" rtlCol="0" anchor="t"/>
+          <a:lstStyle/>
+          <a:p>
+            <a:pPr algn="l" marL="342900" indent="-342900">
+              <a:lnSpc>
+                <a:spcPts val="1620"/>
+              </a:lnSpc>
+              <a:spcAft>
+                <a:spcPts val="300"/>
+              </a:spcAft>
+              <a:buSzPct val="100000"/>
+              <a:buChar char="•"/>
+            </a:pPr>
+            <a:r>
+              <a:rPr lang="en-US" sz="1200" b="1" dirty="0">
+                <a:solidFill>
+                  <a:srgbClr val="1A1A1A"/>
+                </a:solidFill>
+                <a:latin typeface="Georgia" pitchFamily="34" charset="0"/>
+                <a:ea typeface="Georgia" pitchFamily="34" charset="-122"/>
+                <a:cs typeface="Georgia" pitchFamily="34" charset="-120"/>
+              </a:rPr>
+              <a:t>1</a:t>
+            </a:r>
+            <a:pPr algn="l" indent="0" marL="0">
+              <a:lnSpc>
+                <a:spcPts val="1620"/>
+              </a:lnSpc>
+              <a:spcAft>
+                <a:spcPts val="300"/>
+              </a:spcAft>
+              <a:buNone/>
+            </a:pPr>
+            <a:r>
+              <a:rPr lang="en-US" sz="1200" dirty="0">
+                <a:solidFill>
+                  <a:srgbClr val="1A1A1A"/>
+                </a:solidFill>
+                <a:latin typeface="Georgia" pitchFamily="34" charset="0"/>
+                <a:ea typeface="Georgia" pitchFamily="34" charset="-122"/>
+                <a:cs typeface="Georgia" pitchFamily="34" charset="-120"/>
+              </a:rPr>
+              <a:t> — </a:t>
+            </a:r>
+            <a:pPr algn="l" indent="0" marL="0">
+              <a:lnSpc>
+                <a:spcPts val="1620"/>
+              </a:lnSpc>
+              <a:spcAft>
+                <a:spcPts val="300"/>
+              </a:spcAft>
+              <a:buNone/>
+            </a:pPr>
+            <a:r>
+              <a:rPr lang="en-US" sz="1200" i="1" dirty="0">
+                <a:solidFill>
+                  <a:srgbClr val="1A1A1A"/>
+                </a:solidFill>
+                <a:latin typeface="Georgia" pitchFamily="34" charset="0"/>
+                <a:ea typeface="Georgia" pitchFamily="34" charset="-122"/>
+                <a:cs typeface="Georgia" pitchFamily="34" charset="-120"/>
+              </a:rPr>
+              <a:t>Nyāya</a:t>
+            </a:r>
+            <a:pPr algn="l" indent="0" marL="0">
+              <a:lnSpc>
+                <a:spcPts val="1620"/>
+              </a:lnSpc>
+              <a:spcAft>
+                <a:spcPts val="300"/>
+              </a:spcAft>
+              <a:buNone/>
+            </a:pPr>
+            <a:r>
+              <a:rPr lang="en-US" sz="1200" dirty="0">
+                <a:solidFill>
+                  <a:srgbClr val="1A1A1A"/>
+                </a:solidFill>
+                <a:latin typeface="Georgia" pitchFamily="34" charset="0"/>
+                <a:ea typeface="Georgia" pitchFamily="34" charset="-122"/>
+                <a:cs typeface="Georgia" pitchFamily="34" charset="-120"/>
+              </a:rPr>
+              <a:t> · Logic &amp; epistemology — what counts as valid knowledge? · Gautama, </a:t>
+            </a:r>
+            <a:pPr algn="l" indent="0" marL="0">
+              <a:lnSpc>
+                <a:spcPts val="1620"/>
+              </a:lnSpc>
+              <a:spcAft>
+                <a:spcPts val="300"/>
+              </a:spcAft>
+              <a:buNone/>
+            </a:pPr>
+            <a:r>
+              <a:rPr lang="en-US" sz="1200" i="1" dirty="0">
+                <a:solidFill>
+                  <a:srgbClr val="1A1A1A"/>
+                </a:solidFill>
+                <a:latin typeface="Georgia" pitchFamily="34" charset="0"/>
+                <a:ea typeface="Georgia" pitchFamily="34" charset="-122"/>
+                <a:cs typeface="Georgia" pitchFamily="34" charset="-120"/>
+              </a:rPr>
+              <a:t>Nyāya Sūtras</a:t>
+            </a:r>
+            <a:endParaRPr lang="en-US" sz="1200" dirty="0"/>
+          </a:p>
+          <a:p>
+            <a:pPr algn="l" marL="342900" indent="-342900">
+              <a:lnSpc>
+                <a:spcPts val="1620"/>
+              </a:lnSpc>
+              <a:spcAft>
+                <a:spcPts val="300"/>
+              </a:spcAft>
+              <a:buSzPct val="100000"/>
+              <a:buChar char="•"/>
+            </a:pPr>
+            <a:r>
+              <a:rPr lang="en-US" sz="1200" b="1" dirty="0">
+                <a:solidFill>
+                  <a:srgbClr val="1A1A1A"/>
+                </a:solidFill>
+                <a:latin typeface="Georgia" pitchFamily="34" charset="0"/>
+                <a:ea typeface="Georgia" pitchFamily="34" charset="-122"/>
+                <a:cs typeface="Georgia" pitchFamily="34" charset="-120"/>
+              </a:rPr>
+              <a:t>2</a:t>
+            </a:r>
+            <a:pPr algn="l" indent="0" marL="0">
+              <a:lnSpc>
+                <a:spcPts val="1620"/>
+              </a:lnSpc>
+              <a:spcAft>
+                <a:spcPts val="300"/>
+              </a:spcAft>
+              <a:buNone/>
+            </a:pPr>
+            <a:r>
+              <a:rPr lang="en-US" sz="1200" dirty="0">
+                <a:solidFill>
+                  <a:srgbClr val="1A1A1A"/>
+                </a:solidFill>
+                <a:latin typeface="Georgia" pitchFamily="34" charset="0"/>
+                <a:ea typeface="Georgia" pitchFamily="34" charset="-122"/>
+                <a:cs typeface="Georgia" pitchFamily="34" charset="-120"/>
+              </a:rPr>
+              <a:t> — </a:t>
+            </a:r>
+            <a:pPr algn="l" indent="0" marL="0">
+              <a:lnSpc>
+                <a:spcPts val="1620"/>
+              </a:lnSpc>
+              <a:spcAft>
+                <a:spcPts val="300"/>
+              </a:spcAft>
+              <a:buNone/>
+            </a:pPr>
+            <a:r>
+              <a:rPr lang="en-US" sz="1200" i="1" dirty="0">
+                <a:solidFill>
+                  <a:srgbClr val="1A1A1A"/>
+                </a:solidFill>
+                <a:latin typeface="Georgia" pitchFamily="34" charset="0"/>
+                <a:ea typeface="Georgia" pitchFamily="34" charset="-122"/>
+                <a:cs typeface="Georgia" pitchFamily="34" charset="-120"/>
+              </a:rPr>
+              <a:t>Vaiśeṣika</a:t>
+            </a:r>
+            <a:pPr algn="l" indent="0" marL="0">
+              <a:lnSpc>
+                <a:spcPts val="1620"/>
+              </a:lnSpc>
+              <a:spcAft>
+                <a:spcPts val="300"/>
+              </a:spcAft>
+              <a:buNone/>
+            </a:pPr>
+            <a:r>
+              <a:rPr lang="en-US" sz="1200" dirty="0">
+                <a:solidFill>
+                  <a:srgbClr val="1A1A1A"/>
+                </a:solidFill>
+                <a:latin typeface="Georgia" pitchFamily="34" charset="0"/>
+                <a:ea typeface="Georgia" pitchFamily="34" charset="-122"/>
+                <a:cs typeface="Georgia" pitchFamily="34" charset="-120"/>
+              </a:rPr>
+              <a:t> · Atomism &amp; metaphysics — what categories of being exist? · Kaṇāda, </a:t>
+            </a:r>
+            <a:pPr algn="l" indent="0" marL="0">
+              <a:lnSpc>
+                <a:spcPts val="1620"/>
+              </a:lnSpc>
+              <a:spcAft>
+                <a:spcPts val="300"/>
+              </a:spcAft>
+              <a:buNone/>
+            </a:pPr>
+            <a:r>
+              <a:rPr lang="en-US" sz="1200" i="1" dirty="0">
+                <a:solidFill>
+                  <a:srgbClr val="1A1A1A"/>
+                </a:solidFill>
+                <a:latin typeface="Georgia" pitchFamily="34" charset="0"/>
+                <a:ea typeface="Georgia" pitchFamily="34" charset="-122"/>
+                <a:cs typeface="Georgia" pitchFamily="34" charset="-120"/>
+              </a:rPr>
+              <a:t>Vaiśeṣika Sūtras</a:t>
+            </a:r>
+            <a:endParaRPr lang="en-US" sz="1200" dirty="0"/>
+          </a:p>
+          <a:p>
+            <a:pPr algn="l" marL="342900" indent="-342900">
+              <a:lnSpc>
+                <a:spcPts val="1620"/>
+              </a:lnSpc>
+              <a:spcAft>
+                <a:spcPts val="300"/>
+              </a:spcAft>
+              <a:buSzPct val="100000"/>
+              <a:buChar char="•"/>
+            </a:pPr>
+            <a:r>
+              <a:rPr lang="en-US" sz="1200" b="1" dirty="0">
+                <a:solidFill>
+                  <a:srgbClr val="1A1A1A"/>
+                </a:solidFill>
+                <a:latin typeface="Georgia" pitchFamily="34" charset="0"/>
+                <a:ea typeface="Georgia" pitchFamily="34" charset="-122"/>
+                <a:cs typeface="Georgia" pitchFamily="34" charset="-120"/>
+              </a:rPr>
+              <a:t>3</a:t>
+            </a:r>
+            <a:pPr algn="l" indent="0" marL="0">
+              <a:lnSpc>
+                <a:spcPts val="1620"/>
+              </a:lnSpc>
+              <a:spcAft>
+                <a:spcPts val="300"/>
+              </a:spcAft>
+              <a:buNone/>
+            </a:pPr>
+            <a:r>
+              <a:rPr lang="en-US" sz="1200" dirty="0">
+                <a:solidFill>
+                  <a:srgbClr val="1A1A1A"/>
+                </a:solidFill>
+                <a:latin typeface="Georgia" pitchFamily="34" charset="0"/>
+                <a:ea typeface="Georgia" pitchFamily="34" charset="-122"/>
+                <a:cs typeface="Georgia" pitchFamily="34" charset="-120"/>
+              </a:rPr>
+              <a:t> — </a:t>
+            </a:r>
+            <a:pPr algn="l" indent="0" marL="0">
+              <a:lnSpc>
+                <a:spcPts val="1620"/>
+              </a:lnSpc>
+              <a:spcAft>
+                <a:spcPts val="300"/>
+              </a:spcAft>
+              <a:buNone/>
+            </a:pPr>
+            <a:r>
+              <a:rPr lang="en-US" sz="1200" i="1" dirty="0">
+                <a:solidFill>
+                  <a:srgbClr val="1A1A1A"/>
+                </a:solidFill>
+                <a:latin typeface="Georgia" pitchFamily="34" charset="0"/>
+                <a:ea typeface="Georgia" pitchFamily="34" charset="-122"/>
+                <a:cs typeface="Georgia" pitchFamily="34" charset="-120"/>
+              </a:rPr>
+              <a:t>Sāṅkhya</a:t>
+            </a:r>
+            <a:pPr algn="l" indent="0" marL="0">
+              <a:lnSpc>
+                <a:spcPts val="1620"/>
+              </a:lnSpc>
+              <a:spcAft>
+                <a:spcPts val="300"/>
+              </a:spcAft>
+              <a:buNone/>
+            </a:pPr>
+            <a:r>
+              <a:rPr lang="en-US" sz="1200" dirty="0">
+                <a:solidFill>
+                  <a:srgbClr val="1A1A1A"/>
+                </a:solidFill>
+                <a:latin typeface="Georgia" pitchFamily="34" charset="0"/>
+                <a:ea typeface="Georgia" pitchFamily="34" charset="-122"/>
+                <a:cs typeface="Georgia" pitchFamily="34" charset="-120"/>
+              </a:rPr>
+              <a:t> · Cosmology — what are the constituents of reality? · Kapila / Īśvarakṛṣṇa, </a:t>
+            </a:r>
+            <a:pPr algn="l" indent="0" marL="0">
+              <a:lnSpc>
+                <a:spcPts val="1620"/>
+              </a:lnSpc>
+              <a:spcAft>
+                <a:spcPts val="300"/>
+              </a:spcAft>
+              <a:buNone/>
+            </a:pPr>
+            <a:r>
+              <a:rPr lang="en-US" sz="1200" i="1" dirty="0">
+                <a:solidFill>
+                  <a:srgbClr val="1A1A1A"/>
+                </a:solidFill>
+                <a:latin typeface="Georgia" pitchFamily="34" charset="0"/>
+                <a:ea typeface="Georgia" pitchFamily="34" charset="-122"/>
+                <a:cs typeface="Georgia" pitchFamily="34" charset="-120"/>
+              </a:rPr>
+              <a:t>Sāṅkhya Kārikā</a:t>
+            </a:r>
+            <a:pPr algn="l" indent="0" marL="0">
+              <a:lnSpc>
+                <a:spcPts val="1620"/>
+              </a:lnSpc>
+              <a:spcAft>
+                <a:spcPts val="300"/>
+              </a:spcAft>
+              <a:buNone/>
+            </a:pPr>
+            <a:r>
+              <a:rPr lang="en-US" sz="1200" dirty="0">
+                <a:solidFill>
+                  <a:srgbClr val="1A1A1A"/>
+                </a:solidFill>
+                <a:latin typeface="Georgia" pitchFamily="34" charset="0"/>
+                <a:ea typeface="Georgia" pitchFamily="34" charset="-122"/>
+                <a:cs typeface="Georgia" pitchFamily="34" charset="-120"/>
+              </a:rPr>
+              <a:t> (4th c. CE)</a:t>
+            </a:r>
+            <a:endParaRPr lang="en-US" sz="1200" dirty="0"/>
+          </a:p>
+          <a:p>
+            <a:pPr algn="l" marL="342900" indent="-342900">
+              <a:lnSpc>
+                <a:spcPts val="1620"/>
+              </a:lnSpc>
+              <a:spcAft>
+                <a:spcPts val="300"/>
+              </a:spcAft>
+              <a:buSzPct val="100000"/>
+              <a:buChar char="•"/>
+            </a:pPr>
+            <a:r>
+              <a:rPr lang="en-US" sz="1200" b="1" dirty="0">
+                <a:solidFill>
+                  <a:srgbClr val="1A1A1A"/>
+                </a:solidFill>
+                <a:latin typeface="Georgia" pitchFamily="34" charset="0"/>
+                <a:ea typeface="Georgia" pitchFamily="34" charset="-122"/>
+                <a:cs typeface="Georgia" pitchFamily="34" charset="-120"/>
+              </a:rPr>
+              <a:t>4</a:t>
+            </a:r>
+            <a:pPr algn="l" indent="0" marL="0">
+              <a:lnSpc>
+                <a:spcPts val="1620"/>
+              </a:lnSpc>
+              <a:spcAft>
+                <a:spcPts val="300"/>
+              </a:spcAft>
+              <a:buNone/>
+            </a:pPr>
+            <a:r>
+              <a:rPr lang="en-US" sz="1200" dirty="0">
+                <a:solidFill>
+                  <a:srgbClr val="1A1A1A"/>
+                </a:solidFill>
+                <a:latin typeface="Georgia" pitchFamily="34" charset="0"/>
+                <a:ea typeface="Georgia" pitchFamily="34" charset="-122"/>
+                <a:cs typeface="Georgia" pitchFamily="34" charset="-120"/>
+              </a:rPr>
+              <a:t> — </a:t>
+            </a:r>
+            <a:pPr algn="l" indent="0" marL="0">
+              <a:lnSpc>
+                <a:spcPts val="1620"/>
+              </a:lnSpc>
+              <a:spcAft>
+                <a:spcPts val="300"/>
+              </a:spcAft>
+              <a:buNone/>
+            </a:pPr>
+            <a:r>
+              <a:rPr lang="en-US" sz="1200" i="1" dirty="0">
+                <a:solidFill>
+                  <a:srgbClr val="1A1A1A"/>
+                </a:solidFill>
+                <a:latin typeface="Georgia" pitchFamily="34" charset="0"/>
+                <a:ea typeface="Georgia" pitchFamily="34" charset="-122"/>
+                <a:cs typeface="Georgia" pitchFamily="34" charset="-120"/>
+              </a:rPr>
+              <a:t>Yoga</a:t>
+            </a:r>
+            <a:pPr algn="l" indent="0" marL="0">
+              <a:lnSpc>
+                <a:spcPts val="1620"/>
+              </a:lnSpc>
+              <a:spcAft>
+                <a:spcPts val="300"/>
+              </a:spcAft>
+              <a:buNone/>
+            </a:pPr>
+            <a:r>
+              <a:rPr lang="en-US" sz="1200" dirty="0">
+                <a:solidFill>
+                  <a:srgbClr val="1A1A1A"/>
+                </a:solidFill>
+                <a:latin typeface="Georgia" pitchFamily="34" charset="0"/>
+                <a:ea typeface="Georgia" pitchFamily="34" charset="-122"/>
+                <a:cs typeface="Georgia" pitchFamily="34" charset="-120"/>
+              </a:rPr>
+              <a:t> · Practice — how does one settle the mind? · Patañjali, </a:t>
+            </a:r>
+            <a:pPr algn="l" indent="0" marL="0">
+              <a:lnSpc>
+                <a:spcPts val="1620"/>
+              </a:lnSpc>
+              <a:spcAft>
+                <a:spcPts val="300"/>
+              </a:spcAft>
+              <a:buNone/>
+            </a:pPr>
+            <a:r>
+              <a:rPr lang="en-US" sz="1200" i="1" dirty="0">
+                <a:solidFill>
+                  <a:srgbClr val="1A1A1A"/>
+                </a:solidFill>
+                <a:latin typeface="Georgia" pitchFamily="34" charset="0"/>
+                <a:ea typeface="Georgia" pitchFamily="34" charset="-122"/>
+                <a:cs typeface="Georgia" pitchFamily="34" charset="-120"/>
+              </a:rPr>
+              <a:t>Yoga Sūtras</a:t>
+            </a:r>
+            <a:endParaRPr lang="en-US" sz="1200" dirty="0"/>
+          </a:p>
+          <a:p>
+            <a:pPr algn="l" marL="342900" indent="-342900">
+              <a:lnSpc>
+                <a:spcPts val="1620"/>
+              </a:lnSpc>
+              <a:spcAft>
+                <a:spcPts val="300"/>
+              </a:spcAft>
+              <a:buSzPct val="100000"/>
+              <a:buChar char="•"/>
+            </a:pPr>
+            <a:r>
+              <a:rPr lang="en-US" sz="1200" b="1" dirty="0">
+                <a:solidFill>
+                  <a:srgbClr val="1A1A1A"/>
+                </a:solidFill>
+                <a:latin typeface="Georgia" pitchFamily="34" charset="0"/>
+                <a:ea typeface="Georgia" pitchFamily="34" charset="-122"/>
+                <a:cs typeface="Georgia" pitchFamily="34" charset="-120"/>
+              </a:rPr>
+              <a:t>5</a:t>
+            </a:r>
+            <a:pPr algn="l" indent="0" marL="0">
+              <a:lnSpc>
+                <a:spcPts val="1620"/>
+              </a:lnSpc>
+              <a:spcAft>
+                <a:spcPts val="300"/>
+              </a:spcAft>
+              <a:buNone/>
+            </a:pPr>
+            <a:r>
+              <a:rPr lang="en-US" sz="1200" dirty="0">
+                <a:solidFill>
+                  <a:srgbClr val="1A1A1A"/>
+                </a:solidFill>
+                <a:latin typeface="Georgia" pitchFamily="34" charset="0"/>
+                <a:ea typeface="Georgia" pitchFamily="34" charset="-122"/>
+                <a:cs typeface="Georgia" pitchFamily="34" charset="-120"/>
+              </a:rPr>
+              <a:t> — </a:t>
+            </a:r>
+            <a:pPr algn="l" indent="0" marL="0">
+              <a:lnSpc>
+                <a:spcPts val="1620"/>
+              </a:lnSpc>
+              <a:spcAft>
+                <a:spcPts val="300"/>
+              </a:spcAft>
+              <a:buNone/>
+            </a:pPr>
+            <a:r>
+              <a:rPr lang="en-US" sz="1200" i="1" dirty="0">
+                <a:solidFill>
+                  <a:srgbClr val="1A1A1A"/>
+                </a:solidFill>
+                <a:latin typeface="Georgia" pitchFamily="34" charset="0"/>
+                <a:ea typeface="Georgia" pitchFamily="34" charset="-122"/>
+                <a:cs typeface="Georgia" pitchFamily="34" charset="-120"/>
+              </a:rPr>
+              <a:t>Mīmāṁsā</a:t>
+            </a:r>
+            <a:pPr algn="l" indent="0" marL="0">
+              <a:lnSpc>
+                <a:spcPts val="1620"/>
+              </a:lnSpc>
+              <a:spcAft>
+                <a:spcPts val="300"/>
+              </a:spcAft>
+              <a:buNone/>
+            </a:pPr>
+            <a:r>
+              <a:rPr lang="en-US" sz="1200" dirty="0">
+                <a:solidFill>
+                  <a:srgbClr val="1A1A1A"/>
+                </a:solidFill>
+                <a:latin typeface="Georgia" pitchFamily="34" charset="0"/>
+                <a:ea typeface="Georgia" pitchFamily="34" charset="-122"/>
+                <a:cs typeface="Georgia" pitchFamily="34" charset="-120"/>
+              </a:rPr>
+              <a:t> (Pūrva) · Hermeneutics — how do we interpret the Veda? · Jaimini, </a:t>
+            </a:r>
+            <a:pPr algn="l" indent="0" marL="0">
+              <a:lnSpc>
+                <a:spcPts val="1620"/>
+              </a:lnSpc>
+              <a:spcAft>
+                <a:spcPts val="300"/>
+              </a:spcAft>
+              <a:buNone/>
+            </a:pPr>
+            <a:r>
+              <a:rPr lang="en-US" sz="1200" i="1" dirty="0">
+                <a:solidFill>
+                  <a:srgbClr val="1A1A1A"/>
+                </a:solidFill>
+                <a:latin typeface="Georgia" pitchFamily="34" charset="0"/>
+                <a:ea typeface="Georgia" pitchFamily="34" charset="-122"/>
+                <a:cs typeface="Georgia" pitchFamily="34" charset="-120"/>
+              </a:rPr>
+              <a:t>Mīmāṁsā Sūtras</a:t>
+            </a:r>
+            <a:endParaRPr lang="en-US" sz="1200" dirty="0"/>
+          </a:p>
+          <a:p>
+            <a:pPr algn="l" marL="342900" indent="-342900">
+              <a:lnSpc>
+                <a:spcPts val="1620"/>
+              </a:lnSpc>
+              <a:spcAft>
+                <a:spcPts val="300"/>
+              </a:spcAft>
+              <a:buSzPct val="100000"/>
+              <a:buChar char="•"/>
+            </a:pPr>
+            <a:r>
+              <a:rPr lang="en-US" sz="1200" b="1" dirty="0">
+                <a:solidFill>
+                  <a:srgbClr val="1A1A1A"/>
+                </a:solidFill>
+                <a:latin typeface="Georgia" pitchFamily="34" charset="0"/>
+                <a:ea typeface="Georgia" pitchFamily="34" charset="-122"/>
+                <a:cs typeface="Georgia" pitchFamily="34" charset="-120"/>
+              </a:rPr>
+              <a:t>6</a:t>
+            </a:r>
+            <a:pPr algn="l" indent="0" marL="0">
+              <a:lnSpc>
+                <a:spcPts val="1620"/>
+              </a:lnSpc>
+              <a:spcAft>
+                <a:spcPts val="300"/>
+              </a:spcAft>
+              <a:buNone/>
+            </a:pPr>
+            <a:r>
+              <a:rPr lang="en-US" sz="1200" dirty="0">
+                <a:solidFill>
+                  <a:srgbClr val="1A1A1A"/>
+                </a:solidFill>
+                <a:latin typeface="Georgia" pitchFamily="34" charset="0"/>
+                <a:ea typeface="Georgia" pitchFamily="34" charset="-122"/>
+                <a:cs typeface="Georgia" pitchFamily="34" charset="-120"/>
+              </a:rPr>
+              <a:t> — </a:t>
+            </a:r>
+            <a:pPr algn="l" indent="0" marL="0">
+              <a:lnSpc>
+                <a:spcPts val="1620"/>
+              </a:lnSpc>
+              <a:spcAft>
+                <a:spcPts val="300"/>
+              </a:spcAft>
+              <a:buNone/>
+            </a:pPr>
+            <a:r>
+              <a:rPr lang="en-US" sz="1200" i="1" dirty="0">
+                <a:solidFill>
+                  <a:srgbClr val="1A1A1A"/>
+                </a:solidFill>
+                <a:latin typeface="Georgia" pitchFamily="34" charset="0"/>
+                <a:ea typeface="Georgia" pitchFamily="34" charset="-122"/>
+                <a:cs typeface="Georgia" pitchFamily="34" charset="-120"/>
+              </a:rPr>
+              <a:t>Vedānta</a:t>
+            </a:r>
+            <a:pPr algn="l" indent="0" marL="0">
+              <a:lnSpc>
+                <a:spcPts val="1620"/>
+              </a:lnSpc>
+              <a:spcAft>
+                <a:spcPts val="300"/>
+              </a:spcAft>
+              <a:buNone/>
+            </a:pPr>
+            <a:r>
+              <a:rPr lang="en-US" sz="1200" dirty="0">
+                <a:solidFill>
+                  <a:srgbClr val="1A1A1A"/>
+                </a:solidFill>
+                <a:latin typeface="Georgia" pitchFamily="34" charset="0"/>
+                <a:ea typeface="Georgia" pitchFamily="34" charset="-122"/>
+                <a:cs typeface="Georgia" pitchFamily="34" charset="-120"/>
+              </a:rPr>
+              <a:t> (Uttara Mīmāṁsā) · Metaphysics — what is the ultimate? · Bādarāyaṇa, </a:t>
+            </a:r>
+            <a:pPr algn="l" indent="0" marL="0">
+              <a:lnSpc>
+                <a:spcPts val="1620"/>
+              </a:lnSpc>
+              <a:spcAft>
+                <a:spcPts val="300"/>
+              </a:spcAft>
+              <a:buNone/>
+            </a:pPr>
+            <a:r>
+              <a:rPr lang="en-US" sz="1200" i="1" dirty="0">
+                <a:solidFill>
+                  <a:srgbClr val="1A1A1A"/>
+                </a:solidFill>
+                <a:latin typeface="Georgia" pitchFamily="34" charset="0"/>
+                <a:ea typeface="Georgia" pitchFamily="34" charset="-122"/>
+                <a:cs typeface="Georgia" pitchFamily="34" charset="-120"/>
+              </a:rPr>
+              <a:t>Brahma Sūtras</a:t>
+            </a:r>
+            <a:pPr algn="l" indent="0" marL="0">
+              <a:lnSpc>
+                <a:spcPts val="1620"/>
+              </a:lnSpc>
+              <a:spcAft>
+                <a:spcPts val="300"/>
+              </a:spcAft>
+              <a:buNone/>
+            </a:pPr>
+            <a:r>
+              <a:rPr lang="en-US" sz="1200" dirty="0">
+                <a:solidFill>
+                  <a:srgbClr val="1A1A1A"/>
+                </a:solidFill>
+                <a:latin typeface="Georgia" pitchFamily="34" charset="0"/>
+                <a:ea typeface="Georgia" pitchFamily="34" charset="-122"/>
+                <a:cs typeface="Georgia" pitchFamily="34" charset="-120"/>
+              </a:rPr>
+              <a:t>; Śaṅkara, Rāmānuja, Madhva (later interpreters)</a:t>
+            </a:r>
+            <a:endParaRPr lang="en-US" sz="1200" dirty="0"/>
+          </a:p>
+        </p:txBody>
+      </p:sp>
+      <p:sp>
+        <p:nvSpPr>
+          <p:cNvPr id="7" name="Text 5"/>
+          <p:cNvSpPr/>
+          <p:nvPr/>
+        </p:nvSpPr>
+        <p:spPr>
+          <a:xfrm>
+            <a:off x="406301" y="3257848"/>
             <a:ext cx="8498026" cy="639812"/>
           </a:xfrm>
           <a:prstGeom prst="rect">
@@ -3134,13 +3868,13 @@
       </p:sp>
       <p:sp>
         <p:nvSpPr>
-          <p:cNvPr id="6" name="Text 4"/>
+          <p:cNvPr id="8" name="Text 6"/>
           <p:cNvSpPr/>
           <p:nvPr/>
         </p:nvSpPr>
         <p:spPr>
           <a:xfrm>
-            <a:off x="406301" y="4593431"/>
+            <a:off x="406301" y="3973860"/>
             <a:ext cx="8498026" cy="426541"/>
           </a:xfrm>
           <a:prstGeom prst="rect">
@@ -3205,13 +3939,13 @@
       </p:sp>
       <p:sp>
         <p:nvSpPr>
-          <p:cNvPr id="7" name="Text 5"/>
+          <p:cNvPr id="9" name="Text 7"/>
           <p:cNvSpPr/>
           <p:nvPr/>
         </p:nvSpPr>
         <p:spPr>
           <a:xfrm>
-            <a:off x="406301" y="5096173"/>
+            <a:off x="406301" y="4476601"/>
             <a:ext cx="8498026" cy="639812"/>
           </a:xfrm>
           <a:prstGeom prst="rect">
@@ -3368,13 +4102,13 @@
       </p:sp>
       <p:sp>
         <p:nvSpPr>
-          <p:cNvPr id="8" name="Text 6"/>
+          <p:cNvPr id="10" name="Text 8"/>
           <p:cNvSpPr/>
           <p:nvPr/>
         </p:nvSpPr>
         <p:spPr>
           <a:xfrm>
-            <a:off x="406301" y="5888385"/>
+            <a:off x="406301" y="5268813"/>
             <a:ext cx="8498026" cy="213271"/>
           </a:xfrm>
           <a:prstGeom prst="rect">

--- a/exports/pptx/lessons/senior-module-01-what-is-iks/day-03-darshanas.pptx
+++ b/exports/pptx/lessons/senior-module-01-what-is-iks/day-03-darshanas.pptx
@@ -15,9 +15,13 @@
     <p:sldId id="263" r:id="rId9"/>
     <p:sldId id="264" r:id="rId10"/>
     <p:sldId id="265" r:id="rId11"/>
+    <p:sldId id="266" r:id="rId12"/>
+    <p:sldId id="267" r:id="rId13"/>
+    <p:sldId id="268" r:id="rId14"/>
+    <p:sldId id="269" r:id="rId15"/>
   </p:sldIdLst>
   <p:notesMasterIdLst>
-    <p:notesMasterId r:id="rId12"/>
+    <p:notesMasterId r:id="rId16"/>
   </p:notesMasterIdLst>
   <p:sldSz cx="9144000" cy="5143500"/>
   <p:notesSz cx="5143500" cy="9144000"/>
@@ -623,6 +627,358 @@
             <a:fld id="{F7021451-1387-4CA6-816F-3879F97B5CBC}" type="slidenum">
               <a:rPr lang="en-US"/>
               <a:t>10</a:t>
+            </a:fld>
+            <a:endParaRPr lang="en-US"/>
+          </a:p>
+        </p:txBody>
+      </p:sp>
+    </p:spTree>
+    <p:extLst>
+      <p:ext uri="{BB962C8B-B14F-4D97-AF65-F5344CB8AC3E}">
+        <p14:creationId xmlns:p14="http://schemas.microsoft.com/office/powerpoint/2010/main" val="1024086991"/>
+      </p:ext>
+    </p:extLst>
+  </p:cSld>
+  <p:clrMapOvr>
+    <a:masterClrMapping/>
+  </p:clrMapOvr>
+</p:notes>
+</file>
+
+<file path=ppt/notesSlides/notesSlide11.xml><?xml version="1.0" encoding="utf-8"?>
+<p:notes xmlns:a="http://schemas.openxmlformats.org/drawingml/2006/main" xmlns:r="http://schemas.openxmlformats.org/officeDocument/2006/relationships" xmlns:p="http://schemas.openxmlformats.org/presentationml/2006/main">
+  <p:cSld>
+    <p:spTree>
+      <p:nvGrpSpPr>
+        <p:cNvPr id="1" name=""/>
+        <p:cNvGrpSpPr/>
+        <p:nvPr/>
+      </p:nvGrpSpPr>
+      <p:grpSpPr>
+        <a:xfrm>
+          <a:off x="0" y="0"/>
+          <a:ext cx="0" cy="0"/>
+          <a:chOff x="0" y="0"/>
+          <a:chExt cx="0" cy="0"/>
+        </a:xfrm>
+      </p:grpSpPr>
+      <p:sp>
+        <p:nvSpPr>
+          <p:cNvPr id="2" name="Slide Image Placeholder 1"/>
+          <p:cNvSpPr>
+            <a:spLocks noGrp="1" noRot="1" noChangeAspect="1"/>
+          </p:cNvSpPr>
+          <p:nvPr>
+            <p:ph type="sldImg"/>
+          </p:nvPr>
+        </p:nvSpPr>
+        <p:spPr/>
+      </p:sp>
+      <p:sp>
+        <p:nvSpPr>
+          <p:cNvPr id="3" name="Notes Placeholder 2"/>
+          <p:cNvSpPr>
+            <a:spLocks noGrp="1"/>
+          </p:cNvSpPr>
+          <p:nvPr>
+            <p:ph type="body" idx="1"/>
+          </p:nvPr>
+        </p:nvSpPr>
+        <p:spPr/>
+        <p:txBody>
+          <a:bodyPr/>
+          <a:lstStyle/>
+          <a:p>
+            <a:r>
+              <a:rPr lang="en-US" dirty="0"/>
+              <a:t/>
+            </a:r>
+            <a:endParaRPr lang="en-US" dirty="0"/>
+          </a:p>
+        </p:txBody>
+      </p:sp>
+      <p:sp>
+        <p:nvSpPr>
+          <p:cNvPr id="4" name="Slide Number Placeholder 3"/>
+          <p:cNvSpPr>
+            <a:spLocks noGrp="1"/>
+          </p:cNvSpPr>
+          <p:nvPr>
+            <p:ph type="sldNum" sz="quarter" idx="10"/>
+          </p:nvPr>
+        </p:nvSpPr>
+        <p:spPr/>
+        <p:txBody>
+          <a:bodyPr/>
+          <a:lstStyle/>
+          <a:p>
+            <a:fld id="{F7021451-1387-4CA6-816F-3879F97B5CBC}" type="slidenum">
+              <a:rPr lang="en-US"/>
+              <a:t>11</a:t>
+            </a:fld>
+            <a:endParaRPr lang="en-US"/>
+          </a:p>
+        </p:txBody>
+      </p:sp>
+    </p:spTree>
+    <p:extLst>
+      <p:ext uri="{BB962C8B-B14F-4D97-AF65-F5344CB8AC3E}">
+        <p14:creationId xmlns:p14="http://schemas.microsoft.com/office/powerpoint/2010/main" val="1024086991"/>
+      </p:ext>
+    </p:extLst>
+  </p:cSld>
+  <p:clrMapOvr>
+    <a:masterClrMapping/>
+  </p:clrMapOvr>
+</p:notes>
+</file>
+
+<file path=ppt/notesSlides/notesSlide12.xml><?xml version="1.0" encoding="utf-8"?>
+<p:notes xmlns:a="http://schemas.openxmlformats.org/drawingml/2006/main" xmlns:r="http://schemas.openxmlformats.org/officeDocument/2006/relationships" xmlns:p="http://schemas.openxmlformats.org/presentationml/2006/main">
+  <p:cSld>
+    <p:spTree>
+      <p:nvGrpSpPr>
+        <p:cNvPr id="1" name=""/>
+        <p:cNvGrpSpPr/>
+        <p:nvPr/>
+      </p:nvGrpSpPr>
+      <p:grpSpPr>
+        <a:xfrm>
+          <a:off x="0" y="0"/>
+          <a:ext cx="0" cy="0"/>
+          <a:chOff x="0" y="0"/>
+          <a:chExt cx="0" cy="0"/>
+        </a:xfrm>
+      </p:grpSpPr>
+      <p:sp>
+        <p:nvSpPr>
+          <p:cNvPr id="2" name="Slide Image Placeholder 1"/>
+          <p:cNvSpPr>
+            <a:spLocks noGrp="1" noRot="1" noChangeAspect="1"/>
+          </p:cNvSpPr>
+          <p:nvPr>
+            <p:ph type="sldImg"/>
+          </p:nvPr>
+        </p:nvSpPr>
+        <p:spPr/>
+      </p:sp>
+      <p:sp>
+        <p:nvSpPr>
+          <p:cNvPr id="3" name="Notes Placeholder 2"/>
+          <p:cNvSpPr>
+            <a:spLocks noGrp="1"/>
+          </p:cNvSpPr>
+          <p:nvPr>
+            <p:ph type="body" idx="1"/>
+          </p:nvPr>
+        </p:nvSpPr>
+        <p:spPr/>
+        <p:txBody>
+          <a:bodyPr/>
+          <a:lstStyle/>
+          <a:p>
+            <a:r>
+              <a:rPr lang="en-US" dirty="0"/>
+              <a:t/>
+            </a:r>
+            <a:endParaRPr lang="en-US" dirty="0"/>
+          </a:p>
+        </p:txBody>
+      </p:sp>
+      <p:sp>
+        <p:nvSpPr>
+          <p:cNvPr id="4" name="Slide Number Placeholder 3"/>
+          <p:cNvSpPr>
+            <a:spLocks noGrp="1"/>
+          </p:cNvSpPr>
+          <p:nvPr>
+            <p:ph type="sldNum" sz="quarter" idx="10"/>
+          </p:nvPr>
+        </p:nvSpPr>
+        <p:spPr/>
+        <p:txBody>
+          <a:bodyPr/>
+          <a:lstStyle/>
+          <a:p>
+            <a:fld id="{F7021451-1387-4CA6-816F-3879F97B5CBC}" type="slidenum">
+              <a:rPr lang="en-US"/>
+              <a:t>12</a:t>
+            </a:fld>
+            <a:endParaRPr lang="en-US"/>
+          </a:p>
+        </p:txBody>
+      </p:sp>
+    </p:spTree>
+    <p:extLst>
+      <p:ext uri="{BB962C8B-B14F-4D97-AF65-F5344CB8AC3E}">
+        <p14:creationId xmlns:p14="http://schemas.microsoft.com/office/powerpoint/2010/main" val="1024086991"/>
+      </p:ext>
+    </p:extLst>
+  </p:cSld>
+  <p:clrMapOvr>
+    <a:masterClrMapping/>
+  </p:clrMapOvr>
+</p:notes>
+</file>
+
+<file path=ppt/notesSlides/notesSlide13.xml><?xml version="1.0" encoding="utf-8"?>
+<p:notes xmlns:a="http://schemas.openxmlformats.org/drawingml/2006/main" xmlns:r="http://schemas.openxmlformats.org/officeDocument/2006/relationships" xmlns:p="http://schemas.openxmlformats.org/presentationml/2006/main">
+  <p:cSld>
+    <p:spTree>
+      <p:nvGrpSpPr>
+        <p:cNvPr id="1" name=""/>
+        <p:cNvGrpSpPr/>
+        <p:nvPr/>
+      </p:nvGrpSpPr>
+      <p:grpSpPr>
+        <a:xfrm>
+          <a:off x="0" y="0"/>
+          <a:ext cx="0" cy="0"/>
+          <a:chOff x="0" y="0"/>
+          <a:chExt cx="0" cy="0"/>
+        </a:xfrm>
+      </p:grpSpPr>
+      <p:sp>
+        <p:nvSpPr>
+          <p:cNvPr id="2" name="Slide Image Placeholder 1"/>
+          <p:cNvSpPr>
+            <a:spLocks noGrp="1" noRot="1" noChangeAspect="1"/>
+          </p:cNvSpPr>
+          <p:nvPr>
+            <p:ph type="sldImg"/>
+          </p:nvPr>
+        </p:nvSpPr>
+        <p:spPr/>
+      </p:sp>
+      <p:sp>
+        <p:nvSpPr>
+          <p:cNvPr id="3" name="Notes Placeholder 2"/>
+          <p:cNvSpPr>
+            <a:spLocks noGrp="1"/>
+          </p:cNvSpPr>
+          <p:nvPr>
+            <p:ph type="body" idx="1"/>
+          </p:nvPr>
+        </p:nvSpPr>
+        <p:spPr/>
+        <p:txBody>
+          <a:bodyPr/>
+          <a:lstStyle/>
+          <a:p>
+            <a:r>
+              <a:rPr lang="en-US" dirty="0"/>
+              <a:t/>
+            </a:r>
+            <a:endParaRPr lang="en-US" dirty="0"/>
+          </a:p>
+        </p:txBody>
+      </p:sp>
+      <p:sp>
+        <p:nvSpPr>
+          <p:cNvPr id="4" name="Slide Number Placeholder 3"/>
+          <p:cNvSpPr>
+            <a:spLocks noGrp="1"/>
+          </p:cNvSpPr>
+          <p:nvPr>
+            <p:ph type="sldNum" sz="quarter" idx="10"/>
+          </p:nvPr>
+        </p:nvSpPr>
+        <p:spPr/>
+        <p:txBody>
+          <a:bodyPr/>
+          <a:lstStyle/>
+          <a:p>
+            <a:fld id="{F7021451-1387-4CA6-816F-3879F97B5CBC}" type="slidenum">
+              <a:rPr lang="en-US"/>
+              <a:t>13</a:t>
+            </a:fld>
+            <a:endParaRPr lang="en-US"/>
+          </a:p>
+        </p:txBody>
+      </p:sp>
+    </p:spTree>
+    <p:extLst>
+      <p:ext uri="{BB962C8B-B14F-4D97-AF65-F5344CB8AC3E}">
+        <p14:creationId xmlns:p14="http://schemas.microsoft.com/office/powerpoint/2010/main" val="1024086991"/>
+      </p:ext>
+    </p:extLst>
+  </p:cSld>
+  <p:clrMapOvr>
+    <a:masterClrMapping/>
+  </p:clrMapOvr>
+</p:notes>
+</file>
+
+<file path=ppt/notesSlides/notesSlide14.xml><?xml version="1.0" encoding="utf-8"?>
+<p:notes xmlns:a="http://schemas.openxmlformats.org/drawingml/2006/main" xmlns:r="http://schemas.openxmlformats.org/officeDocument/2006/relationships" xmlns:p="http://schemas.openxmlformats.org/presentationml/2006/main">
+  <p:cSld>
+    <p:spTree>
+      <p:nvGrpSpPr>
+        <p:cNvPr id="1" name=""/>
+        <p:cNvGrpSpPr/>
+        <p:nvPr/>
+      </p:nvGrpSpPr>
+      <p:grpSpPr>
+        <a:xfrm>
+          <a:off x="0" y="0"/>
+          <a:ext cx="0" cy="0"/>
+          <a:chOff x="0" y="0"/>
+          <a:chExt cx="0" cy="0"/>
+        </a:xfrm>
+      </p:grpSpPr>
+      <p:sp>
+        <p:nvSpPr>
+          <p:cNvPr id="2" name="Slide Image Placeholder 1"/>
+          <p:cNvSpPr>
+            <a:spLocks noGrp="1" noRot="1" noChangeAspect="1"/>
+          </p:cNvSpPr>
+          <p:nvPr>
+            <p:ph type="sldImg"/>
+          </p:nvPr>
+        </p:nvSpPr>
+        <p:spPr/>
+      </p:sp>
+      <p:sp>
+        <p:nvSpPr>
+          <p:cNvPr id="3" name="Notes Placeholder 2"/>
+          <p:cNvSpPr>
+            <a:spLocks noGrp="1"/>
+          </p:cNvSpPr>
+          <p:nvPr>
+            <p:ph type="body" idx="1"/>
+          </p:nvPr>
+        </p:nvSpPr>
+        <p:spPr/>
+        <p:txBody>
+          <a:bodyPr/>
+          <a:lstStyle/>
+          <a:p>
+            <a:r>
+              <a:rPr lang="en-US" dirty="0"/>
+              <a:t/>
+            </a:r>
+            <a:endParaRPr lang="en-US" dirty="0"/>
+          </a:p>
+        </p:txBody>
+      </p:sp>
+      <p:sp>
+        <p:nvSpPr>
+          <p:cNvPr id="4" name="Slide Number Placeholder 3"/>
+          <p:cNvSpPr>
+            <a:spLocks noGrp="1"/>
+          </p:cNvSpPr>
+          <p:nvPr>
+            <p:ph type="sldNum" sz="quarter" idx="10"/>
+          </p:nvPr>
+        </p:nvSpPr>
+        <p:spPr/>
+        <p:txBody>
+          <a:bodyPr/>
+          <a:lstStyle/>
+          <a:p>
+            <a:fld id="{F7021451-1387-4CA6-816F-3879F97B5CBC}" type="slidenum">
+              <a:rPr lang="en-US"/>
+              <a:t>14</a:t>
             </a:fld>
             <a:endParaRPr lang="en-US"/>
           </a:p>
@@ -1876,102 +2232,6 @@
         </p:nvSpPr>
         <p:spPr>
           <a:xfrm>
-            <a:off x="406301" y="1223963"/>
-            <a:ext cx="8498026" cy="274290"/>
-          </a:xfrm>
-          <a:prstGeom prst="rect">
-            <a:avLst/>
-          </a:prstGeom>
-          <a:noFill/>
-          <a:ln/>
-        </p:spPr>
-        <p:txBody>
-          <a:bodyPr wrap="square" lIns="0" tIns="0" rIns="0" bIns="0" rtlCol="0" anchor="t"/>
-          <a:lstStyle/>
-          <a:p>
-            <a:pPr algn="l" indent="0" marL="0">
-              <a:lnSpc>
-                <a:spcPts val="2160"/>
-              </a:lnSpc>
-              <a:spcBef>
-                <a:spcPts val="600"/>
-              </a:spcBef>
-              <a:spcAft>
-                <a:spcPts val="800"/>
-              </a:spcAft>
-              <a:buNone/>
-            </a:pPr>
-            <a:r>
-              <a:rPr lang="en-US" sz="1800" b="1" dirty="0">
-                <a:solidFill>
-                  <a:srgbClr val="997929"/>
-                </a:solidFill>
-                <a:latin typeface="Times New Roman" pitchFamily="34" charset="0"/>
-                <a:ea typeface="Times New Roman" pitchFamily="34" charset="-122"/>
-                <a:cs typeface="Times New Roman" pitchFamily="34" charset="-120"/>
-              </a:rPr>
-              <a:t>Learning objective</a:t>
-            </a:r>
-            <a:endParaRPr lang="en-US" sz="1800" dirty="0"/>
-          </a:p>
-        </p:txBody>
-      </p:sp>
-      <p:sp>
-        <p:nvSpPr>
-          <p:cNvPr id="6" name="Text 4"/>
-          <p:cNvSpPr/>
-          <p:nvPr/>
-        </p:nvSpPr>
-        <p:spPr>
-          <a:xfrm>
-            <a:off x="406301" y="1637854"/>
-            <a:ext cx="8498026" cy="213271"/>
-          </a:xfrm>
-          <a:prstGeom prst="rect">
-            <a:avLst/>
-          </a:prstGeom>
-          <a:noFill/>
-          <a:ln/>
-        </p:spPr>
-        <p:txBody>
-          <a:bodyPr wrap="square" lIns="0" tIns="0" rIns="0" bIns="0" rtlCol="0" anchor="t"/>
-          <a:lstStyle/>
-          <a:p>
-            <a:pPr algn="l" indent="0" marL="0">
-              <a:lnSpc>
-                <a:spcPts val="1680"/>
-              </a:lnSpc>
-              <a:spcBef>
-                <a:spcPts val="300"/>
-              </a:spcBef>
-              <a:spcAft>
-                <a:spcPts val="300"/>
-              </a:spcAft>
-              <a:buNone/>
-            </a:pPr>
-            <a:r>
-              <a:rPr lang="en-US" sz="1200" dirty="0">
-                <a:solidFill>
-                  <a:srgbClr val="1A1A1A"/>
-                </a:solidFill>
-                <a:latin typeface="Georgia" pitchFamily="34" charset="0"/>
-                <a:ea typeface="Georgia" pitchFamily="34" charset="-122"/>
-                <a:cs typeface="Georgia" pitchFamily="34" charset="-120"/>
-              </a:rPr>
-              <a:t>Students name the six classical philosophical schools (darśanas) and the central question each addresses.</a:t>
-            </a:r>
-            <a:endParaRPr lang="en-US" sz="1200" dirty="0"/>
-          </a:p>
-        </p:txBody>
-      </p:sp>
-      <p:sp>
-        <p:nvSpPr>
-          <p:cNvPr id="7" name="Text 5"/>
-          <p:cNvSpPr/>
-          <p:nvPr/>
-        </p:nvSpPr>
-        <p:spPr>
-          <a:xfrm>
             <a:off x="406301" y="4434929"/>
             <a:ext cx="8498026" cy="213271"/>
           </a:xfrm>
@@ -2116,7 +2376,7 @@
                 <a:ea typeface="Times New Roman" pitchFamily="34" charset="-122"/>
                 <a:cs typeface="Times New Roman" pitchFamily="34" charset="-120"/>
               </a:rPr>
-              <a:t>Citation(s) used</a:t>
+              <a:t>Discussion (10 min)</a:t>
             </a:r>
             <a:endParaRPr lang="en-US" sz="1800" dirty="0"/>
           </a:p>
@@ -2130,7 +2390,173 @@
         </p:nvSpPr>
         <p:spPr>
           <a:xfrm>
-            <a:off x="406301" y="870942"/>
+            <a:off x="634901" y="883593"/>
+            <a:ext cx="8102798" cy="1500783"/>
+          </a:xfrm>
+          <a:prstGeom prst="rect">
+            <a:avLst/>
+          </a:prstGeom>
+          <a:noFill/>
+          <a:ln/>
+        </p:spPr>
+        <p:txBody>
+          <a:bodyPr wrap="square" lIns="0" tIns="0" rIns="0" bIns="0" rtlCol="0" anchor="t"/>
+          <a:lstStyle/>
+          <a:p>
+            <a:pPr algn="l" marL="342900" indent="-342900">
+              <a:lnSpc>
+                <a:spcPts val="1620"/>
+              </a:lnSpc>
+              <a:spcAft>
+                <a:spcPts val="300"/>
+              </a:spcAft>
+              <a:buSzPct val="100000"/>
+              <a:buChar char="•"/>
+            </a:pPr>
+            <a:r>
+              <a:rPr lang="en-US" sz="1200" dirty="0">
+                <a:solidFill>
+                  <a:srgbClr val="1A1A1A"/>
+                </a:solidFill>
+                <a:latin typeface="Georgia" pitchFamily="34" charset="0"/>
+                <a:ea typeface="Georgia" pitchFamily="34" charset="-122"/>
+                <a:cs typeface="Georgia" pitchFamily="34" charset="-120"/>
+              </a:rPr>
+              <a:t>Which darśana would address each question?</a:t>
+            </a:r>
+            <a:endParaRPr lang="en-US" sz="1200" dirty="0"/>
+          </a:p>
+          <a:p>
+            <a:pPr algn="l" marL="342900" indent="-342900">
+              <a:lnSpc>
+                <a:spcPts val="1620"/>
+              </a:lnSpc>
+              <a:spcAft>
+                <a:spcPts val="300"/>
+              </a:spcAft>
+              <a:buSzPct val="100000"/>
+              <a:buChar char="•"/>
+            </a:pPr>
+            <a:r>
+              <a:rPr lang="en-US" sz="1200" dirty="0">
+                <a:solidFill>
+                  <a:srgbClr val="1A1A1A"/>
+                </a:solidFill>
+                <a:latin typeface="Georgia" pitchFamily="34" charset="0"/>
+                <a:ea typeface="Georgia" pitchFamily="34" charset="-122"/>
+                <a:cs typeface="Georgia" pitchFamily="34" charset="-120"/>
+              </a:rPr>
+              <a:t>"What does it mean to know something?" → Nyāya</a:t>
+            </a:r>
+            <a:endParaRPr lang="en-US" sz="1200" dirty="0"/>
+          </a:p>
+          <a:p>
+            <a:pPr algn="l" marL="342900" indent="-342900">
+              <a:lnSpc>
+                <a:spcPts val="1620"/>
+              </a:lnSpc>
+              <a:spcAft>
+                <a:spcPts val="300"/>
+              </a:spcAft>
+              <a:buSzPct val="100000"/>
+              <a:buChar char="•"/>
+            </a:pPr>
+            <a:r>
+              <a:rPr lang="en-US" sz="1200" dirty="0">
+                <a:solidFill>
+                  <a:srgbClr val="1A1A1A"/>
+                </a:solidFill>
+                <a:latin typeface="Georgia" pitchFamily="34" charset="0"/>
+                <a:ea typeface="Georgia" pitchFamily="34" charset="-122"/>
+                <a:cs typeface="Georgia" pitchFamily="34" charset="-120"/>
+              </a:rPr>
+              <a:t>"Why does my mind keep wandering?" → Yoga</a:t>
+            </a:r>
+            <a:endParaRPr lang="en-US" sz="1200" dirty="0"/>
+          </a:p>
+          <a:p>
+            <a:pPr algn="l" marL="342900" indent="-342900">
+              <a:lnSpc>
+                <a:spcPts val="1620"/>
+              </a:lnSpc>
+              <a:spcAft>
+                <a:spcPts val="300"/>
+              </a:spcAft>
+              <a:buSzPct val="100000"/>
+              <a:buChar char="•"/>
+            </a:pPr>
+            <a:r>
+              <a:rPr lang="en-US" sz="1200" dirty="0">
+                <a:solidFill>
+                  <a:srgbClr val="1A1A1A"/>
+                </a:solidFill>
+                <a:latin typeface="Georgia" pitchFamily="34" charset="0"/>
+                <a:ea typeface="Georgia" pitchFamily="34" charset="-122"/>
+                <a:cs typeface="Georgia" pitchFamily="34" charset="-120"/>
+              </a:rPr>
+              <a:t>"How should we read the Veda?" → Mīmāṁsā</a:t>
+            </a:r>
+            <a:endParaRPr lang="en-US" sz="1200" dirty="0"/>
+          </a:p>
+          <a:p>
+            <a:pPr algn="l" marL="342900" indent="-342900">
+              <a:lnSpc>
+                <a:spcPts val="1620"/>
+              </a:lnSpc>
+              <a:spcAft>
+                <a:spcPts val="300"/>
+              </a:spcAft>
+              <a:buSzPct val="100000"/>
+              <a:buChar char="•"/>
+            </a:pPr>
+            <a:r>
+              <a:rPr lang="en-US" sz="1200" dirty="0">
+                <a:solidFill>
+                  <a:srgbClr val="1A1A1A"/>
+                </a:solidFill>
+                <a:latin typeface="Georgia" pitchFamily="34" charset="0"/>
+                <a:ea typeface="Georgia" pitchFamily="34" charset="-122"/>
+                <a:cs typeface="Georgia" pitchFamily="34" charset="-120"/>
+              </a:rPr>
+              <a:t>"What is the relationship between the individual self and ultimate reality?" → Vedānta</a:t>
+            </a:r>
+            <a:endParaRPr lang="en-US" sz="1200" dirty="0"/>
+          </a:p>
+          <a:p>
+            <a:pPr algn="l" marL="342900" indent="-342900">
+              <a:lnSpc>
+                <a:spcPts val="1620"/>
+              </a:lnSpc>
+              <a:spcAft>
+                <a:spcPts val="300"/>
+              </a:spcAft>
+              <a:buSzPct val="100000"/>
+              <a:buChar char="•"/>
+            </a:pPr>
+            <a:r>
+              <a:rPr lang="en-US" sz="1200" dirty="0">
+                <a:solidFill>
+                  <a:srgbClr val="1A1A1A"/>
+                </a:solidFill>
+                <a:latin typeface="Georgia" pitchFamily="34" charset="0"/>
+                <a:ea typeface="Georgia" pitchFamily="34" charset="-122"/>
+                <a:cs typeface="Georgia" pitchFamily="34" charset="-120"/>
+              </a:rPr>
+              <a:t>"What are matter's smallest units?" → Vaiśeṣika</a:t>
+            </a:r>
+            <a:endParaRPr lang="en-US" sz="1200" dirty="0"/>
+          </a:p>
+        </p:txBody>
+      </p:sp>
+      <p:sp>
+        <p:nvSpPr>
+          <p:cNvPr id="5" name="Text 3"/>
+          <p:cNvSpPr/>
+          <p:nvPr/>
+        </p:nvSpPr>
+        <p:spPr>
+          <a:xfrm>
+            <a:off x="406301" y="4434929"/>
             <a:ext cx="8498026" cy="213271"/>
           </a:xfrm>
           <a:prstGeom prst="rect">
@@ -2164,7 +2590,947 @@
                 <a:ea typeface="Georgia" pitchFamily="34" charset="-122"/>
                 <a:cs typeface="Georgia" pitchFamily="34" charset="-120"/>
               </a:rPr>
-              <a:t>– Olivelle (1996, ed.) on the Upanishadic background. – Matilal (1986) for Nyāya logic. – Bryant (2009) for Yoga.</a:t>
+              <a:t>Senior ·  · IKS Curriculum</a:t>
+            </a:r>
+            <a:endParaRPr lang="en-US" sz="1200" dirty="0"/>
+          </a:p>
+        </p:txBody>
+      </p:sp>
+    </p:spTree>
+  </p:cSld>
+  <p:clrMapOvr>
+    <a:masterClrMapping/>
+  </p:clrMapOvr>
+</p:sld>
+</file>
+
+<file path=ppt/slides/slide11.xml><?xml version="1.0" encoding="utf-8"?>
+<p:sld xmlns:a="http://schemas.openxmlformats.org/drawingml/2006/main" xmlns:r="http://schemas.openxmlformats.org/officeDocument/2006/relationships" xmlns:p="http://schemas.openxmlformats.org/presentationml/2006/main">
+  <p:cSld name="Slide 11">
+    <p:bg>
+      <p:bgPr>
+        <a:solidFill>
+          <a:srgbClr val="FAF7F2"/>
+        </a:solidFill>
+      </p:bgPr>
+    </p:bg>
+    <p:spTree>
+      <p:nvGrpSpPr>
+        <p:cNvPr id="1" name=""/>
+        <p:cNvGrpSpPr/>
+        <p:nvPr/>
+      </p:nvGrpSpPr>
+      <p:grpSpPr>
+        <a:xfrm>
+          <a:off x="0" y="0"/>
+          <a:ext cx="0" cy="0"/>
+          <a:chOff x="0" y="0"/>
+          <a:chExt cx="0" cy="0"/>
+        </a:xfrm>
+      </p:grpSpPr>
+      <p:sp>
+        <p:nvSpPr>
+          <p:cNvPr id="2" name="Text 0"/>
+          <p:cNvSpPr/>
+          <p:nvPr/>
+        </p:nvSpPr>
+        <p:spPr>
+          <a:xfrm>
+            <a:off x="0" y="0"/>
+            <a:ext cx="9144000" cy="101501"/>
+          </a:xfrm>
+          <a:prstGeom prst="rect">
+            <a:avLst/>
+          </a:prstGeom>
+          <a:solidFill>
+            <a:srgbClr val="5D1D2E"/>
+          </a:solidFill>
+          <a:ln/>
+        </p:spPr>
+        <p:txBody>
+          <a:bodyPr wrap="square" rtlCol="0" anchor="ctr"/>
+          <a:lstStyle/>
+          <a:p>
+            <a:pPr indent="0" marL="0">
+              <a:buNone/>
+            </a:pPr>
+            <a:endParaRPr lang="en-US" dirty="0"/>
+          </a:p>
+        </p:txBody>
+      </p:sp>
+      <p:sp>
+        <p:nvSpPr>
+          <p:cNvPr id="3" name="Text 1"/>
+          <p:cNvSpPr/>
+          <p:nvPr/>
+        </p:nvSpPr>
+        <p:spPr>
+          <a:xfrm>
+            <a:off x="406301" y="457051"/>
+            <a:ext cx="8498026" cy="274290"/>
+          </a:xfrm>
+          <a:prstGeom prst="rect">
+            <a:avLst/>
+          </a:prstGeom>
+          <a:noFill/>
+          <a:ln/>
+        </p:spPr>
+        <p:txBody>
+          <a:bodyPr wrap="square" lIns="0" tIns="0" rIns="0" bIns="0" rtlCol="0" anchor="t"/>
+          <a:lstStyle/>
+          <a:p>
+            <a:pPr algn="l" indent="0" marL="0">
+              <a:lnSpc>
+                <a:spcPts val="2160"/>
+              </a:lnSpc>
+              <a:spcBef>
+                <a:spcPts val="600"/>
+              </a:spcBef>
+              <a:spcAft>
+                <a:spcPts val="800"/>
+              </a:spcAft>
+              <a:buNone/>
+            </a:pPr>
+            <a:r>
+              <a:rPr lang="en-US" sz="1800" b="1" dirty="0">
+                <a:solidFill>
+                  <a:srgbClr val="997929"/>
+                </a:solidFill>
+                <a:latin typeface="Times New Roman" pitchFamily="34" charset="0"/>
+                <a:ea typeface="Times New Roman" pitchFamily="34" charset="-122"/>
+                <a:cs typeface="Times New Roman" pitchFamily="34" charset="-120"/>
+              </a:rPr>
+              <a:t>Wrap-up (5 min)</a:t>
+            </a:r>
+            <a:endParaRPr lang="en-US" sz="1800" dirty="0"/>
+          </a:p>
+        </p:txBody>
+      </p:sp>
+      <p:sp>
+        <p:nvSpPr>
+          <p:cNvPr id="4" name="Text 2"/>
+          <p:cNvSpPr/>
+          <p:nvPr/>
+        </p:nvSpPr>
+        <p:spPr>
+          <a:xfrm>
+            <a:off x="634901" y="883593"/>
+            <a:ext cx="8102798" cy="281880"/>
+          </a:xfrm>
+          <a:prstGeom prst="rect">
+            <a:avLst/>
+          </a:prstGeom>
+          <a:noFill/>
+          <a:ln/>
+        </p:spPr>
+        <p:txBody>
+          <a:bodyPr wrap="square" lIns="0" tIns="0" rIns="0" bIns="0" rtlCol="0" anchor="t"/>
+          <a:lstStyle/>
+          <a:p>
+            <a:pPr algn="l" marL="342900" indent="-342900">
+              <a:lnSpc>
+                <a:spcPts val="1620"/>
+              </a:lnSpc>
+              <a:spcAft>
+                <a:spcPts val="300"/>
+              </a:spcAft>
+              <a:buSzPct val="100000"/>
+              <a:buChar char="•"/>
+            </a:pPr>
+            <a:r>
+              <a:rPr lang="en-US" sz="1200" dirty="0">
+                <a:solidFill>
+                  <a:srgbClr val="1A1A1A"/>
+                </a:solidFill>
+                <a:latin typeface="Georgia" pitchFamily="34" charset="0"/>
+                <a:ea typeface="Georgia" pitchFamily="34" charset="-122"/>
+                <a:cs typeface="Georgia" pitchFamily="34" charset="-120"/>
+              </a:rPr>
+              <a:t>Preview Day 4: </a:t>
+            </a:r>
+            <a:pPr algn="l" indent="0" marL="0">
+              <a:lnSpc>
+                <a:spcPts val="1620"/>
+              </a:lnSpc>
+              <a:spcAft>
+                <a:spcPts val="300"/>
+              </a:spcAft>
+              <a:buNone/>
+            </a:pPr>
+            <a:r>
+              <a:rPr lang="en-US" sz="1200" i="1" dirty="0">
+                <a:solidFill>
+                  <a:srgbClr val="1A1A1A"/>
+                </a:solidFill>
+                <a:latin typeface="Georgia" pitchFamily="34" charset="0"/>
+                <a:ea typeface="Georgia" pitchFamily="34" charset="-122"/>
+                <a:cs typeface="Georgia" pitchFamily="34" charset="-120"/>
+              </a:rPr>
+              <a:t>"Tomorrow — Indian mathematics in specifics. Bakhshali, Bhāskara, Mādhava."</a:t>
+            </a:r>
+            <a:endParaRPr lang="en-US" sz="1200" dirty="0"/>
+          </a:p>
+        </p:txBody>
+      </p:sp>
+      <p:sp>
+        <p:nvSpPr>
+          <p:cNvPr id="5" name="Text 3"/>
+          <p:cNvSpPr/>
+          <p:nvPr/>
+        </p:nvSpPr>
+        <p:spPr>
+          <a:xfrm>
+            <a:off x="406301" y="4434929"/>
+            <a:ext cx="8498026" cy="213271"/>
+          </a:xfrm>
+          <a:prstGeom prst="rect">
+            <a:avLst/>
+          </a:prstGeom>
+          <a:noFill/>
+          <a:ln/>
+        </p:spPr>
+        <p:txBody>
+          <a:bodyPr wrap="square" lIns="0" tIns="0" rIns="0" bIns="0" rtlCol="0" anchor="t"/>
+          <a:lstStyle/>
+          <a:p>
+            <a:pPr algn="l" indent="0" marL="0">
+              <a:lnSpc>
+                <a:spcPts val="1680"/>
+              </a:lnSpc>
+              <a:spcBef>
+                <a:spcPts val="300"/>
+              </a:spcBef>
+              <a:spcAft>
+                <a:spcPts val="300"/>
+              </a:spcAft>
+              <a:buNone/>
+            </a:pPr>
+            <a:r>
+              <a:rPr lang="en-US" sz="1200" dirty="0">
+                <a:solidFill>
+                  <a:srgbClr val="1A1A1A"/>
+                </a:solidFill>
+                <a:latin typeface="Georgia" pitchFamily="34" charset="0"/>
+                <a:ea typeface="Georgia" pitchFamily="34" charset="-122"/>
+                <a:cs typeface="Georgia" pitchFamily="34" charset="-120"/>
+              </a:rPr>
+              <a:t>Senior ·  · IKS Curriculum</a:t>
+            </a:r>
+            <a:endParaRPr lang="en-US" sz="1200" dirty="0"/>
+          </a:p>
+        </p:txBody>
+      </p:sp>
+    </p:spTree>
+  </p:cSld>
+  <p:clrMapOvr>
+    <a:masterClrMapping/>
+  </p:clrMapOvr>
+</p:sld>
+</file>
+
+<file path=ppt/slides/slide12.xml><?xml version="1.0" encoding="utf-8"?>
+<p:sld xmlns:a="http://schemas.openxmlformats.org/drawingml/2006/main" xmlns:r="http://schemas.openxmlformats.org/officeDocument/2006/relationships" xmlns:p="http://schemas.openxmlformats.org/presentationml/2006/main">
+  <p:cSld name="Slide 12">
+    <p:bg>
+      <p:bgPr>
+        <a:solidFill>
+          <a:srgbClr val="FAF7F2"/>
+        </a:solidFill>
+      </p:bgPr>
+    </p:bg>
+    <p:spTree>
+      <p:nvGrpSpPr>
+        <p:cNvPr id="1" name=""/>
+        <p:cNvGrpSpPr/>
+        <p:nvPr/>
+      </p:nvGrpSpPr>
+      <p:grpSpPr>
+        <a:xfrm>
+          <a:off x="0" y="0"/>
+          <a:ext cx="0" cy="0"/>
+          <a:chOff x="0" y="0"/>
+          <a:chExt cx="0" cy="0"/>
+        </a:xfrm>
+      </p:grpSpPr>
+      <p:sp>
+        <p:nvSpPr>
+          <p:cNvPr id="2" name="Text 0"/>
+          <p:cNvSpPr/>
+          <p:nvPr/>
+        </p:nvSpPr>
+        <p:spPr>
+          <a:xfrm>
+            <a:off x="0" y="0"/>
+            <a:ext cx="9144000" cy="101501"/>
+          </a:xfrm>
+          <a:prstGeom prst="rect">
+            <a:avLst/>
+          </a:prstGeom>
+          <a:solidFill>
+            <a:srgbClr val="5D1D2E"/>
+          </a:solidFill>
+          <a:ln/>
+        </p:spPr>
+        <p:txBody>
+          <a:bodyPr wrap="square" rtlCol="0" anchor="ctr"/>
+          <a:lstStyle/>
+          <a:p>
+            <a:pPr indent="0" marL="0">
+              <a:buNone/>
+            </a:pPr>
+            <a:endParaRPr lang="en-US" dirty="0"/>
+          </a:p>
+        </p:txBody>
+      </p:sp>
+      <p:sp>
+        <p:nvSpPr>
+          <p:cNvPr id="3" name="Text 1"/>
+          <p:cNvSpPr/>
+          <p:nvPr/>
+        </p:nvSpPr>
+        <p:spPr>
+          <a:xfrm>
+            <a:off x="406301" y="457051"/>
+            <a:ext cx="8498026" cy="274290"/>
+          </a:xfrm>
+          <a:prstGeom prst="rect">
+            <a:avLst/>
+          </a:prstGeom>
+          <a:noFill/>
+          <a:ln/>
+        </p:spPr>
+        <p:txBody>
+          <a:bodyPr wrap="square" lIns="0" tIns="0" rIns="0" bIns="0" rtlCol="0" anchor="t"/>
+          <a:lstStyle/>
+          <a:p>
+            <a:pPr algn="l" indent="0" marL="0">
+              <a:lnSpc>
+                <a:spcPts val="2160"/>
+              </a:lnSpc>
+              <a:spcBef>
+                <a:spcPts val="600"/>
+              </a:spcBef>
+              <a:spcAft>
+                <a:spcPts val="800"/>
+              </a:spcAft>
+              <a:buNone/>
+            </a:pPr>
+            <a:r>
+              <a:rPr lang="en-US" sz="1800" b="1" dirty="0">
+                <a:solidFill>
+                  <a:srgbClr val="997929"/>
+                </a:solidFill>
+                <a:latin typeface="Times New Roman" pitchFamily="34" charset="0"/>
+                <a:ea typeface="Times New Roman" pitchFamily="34" charset="-122"/>
+                <a:cs typeface="Times New Roman" pitchFamily="34" charset="-120"/>
+              </a:rPr>
+              <a:t>Differentiation</a:t>
+            </a:r>
+            <a:endParaRPr lang="en-US" sz="1800" dirty="0"/>
+          </a:p>
+        </p:txBody>
+      </p:sp>
+      <p:sp>
+        <p:nvSpPr>
+          <p:cNvPr id="4" name="Text 2"/>
+          <p:cNvSpPr/>
+          <p:nvPr/>
+        </p:nvSpPr>
+        <p:spPr>
+          <a:xfrm>
+            <a:off x="634901" y="883593"/>
+            <a:ext cx="8102798" cy="525661"/>
+          </a:xfrm>
+          <a:prstGeom prst="rect">
+            <a:avLst/>
+          </a:prstGeom>
+          <a:noFill/>
+          <a:ln/>
+        </p:spPr>
+        <p:txBody>
+          <a:bodyPr wrap="square" lIns="0" tIns="0" rIns="0" bIns="0" rtlCol="0" anchor="t"/>
+          <a:lstStyle/>
+          <a:p>
+            <a:pPr algn="l" marL="342900" indent="-342900">
+              <a:lnSpc>
+                <a:spcPts val="1620"/>
+              </a:lnSpc>
+              <a:spcAft>
+                <a:spcPts val="300"/>
+              </a:spcAft>
+              <a:buSzPct val="100000"/>
+              <a:buChar char="•"/>
+            </a:pPr>
+            <a:r>
+              <a:rPr lang="en-US" sz="1200" b="1" dirty="0">
+                <a:solidFill>
+                  <a:srgbClr val="1A1A1A"/>
+                </a:solidFill>
+                <a:latin typeface="Georgia" pitchFamily="34" charset="0"/>
+                <a:ea typeface="Georgia" pitchFamily="34" charset="-122"/>
+                <a:cs typeface="Georgia" pitchFamily="34" charset="-120"/>
+              </a:rPr>
+              <a:t>Tier up:</a:t>
+            </a:r>
+            <a:pPr algn="l" indent="0" marL="0">
+              <a:lnSpc>
+                <a:spcPts val="1620"/>
+              </a:lnSpc>
+              <a:spcAft>
+                <a:spcPts val="300"/>
+              </a:spcAft>
+              <a:buNone/>
+            </a:pPr>
+            <a:r>
+              <a:rPr lang="en-US" sz="1200" dirty="0">
+                <a:solidFill>
+                  <a:srgbClr val="1A1A1A"/>
+                </a:solidFill>
+                <a:latin typeface="Georgia" pitchFamily="34" charset="0"/>
+                <a:ea typeface="Georgia" pitchFamily="34" charset="-122"/>
+                <a:cs typeface="Georgia" pitchFamily="34" charset="-120"/>
+              </a:rPr>
+              <a:t> Read Matilal, B. K. (1986). </a:t>
+            </a:r>
+            <a:pPr algn="l" indent="0" marL="0">
+              <a:lnSpc>
+                <a:spcPts val="1620"/>
+              </a:lnSpc>
+              <a:spcAft>
+                <a:spcPts val="300"/>
+              </a:spcAft>
+              <a:buNone/>
+            </a:pPr>
+            <a:r>
+              <a:rPr lang="en-US" sz="1200" i="1" dirty="0">
+                <a:solidFill>
+                  <a:srgbClr val="1A1A1A"/>
+                </a:solidFill>
+                <a:latin typeface="Georgia" pitchFamily="34" charset="0"/>
+                <a:ea typeface="Georgia" pitchFamily="34" charset="-122"/>
+                <a:cs typeface="Georgia" pitchFamily="34" charset="-120"/>
+              </a:rPr>
+              <a:t>Perception: An Essay on Classical Indian Theories of Knowledge</a:t>
+            </a:r>
+            <a:pPr algn="l" indent="0" marL="0">
+              <a:lnSpc>
+                <a:spcPts val="1620"/>
+              </a:lnSpc>
+              <a:spcAft>
+                <a:spcPts val="300"/>
+              </a:spcAft>
+              <a:buNone/>
+            </a:pPr>
+            <a:r>
+              <a:rPr lang="en-US" sz="1200" dirty="0">
+                <a:solidFill>
+                  <a:srgbClr val="1A1A1A"/>
+                </a:solidFill>
+                <a:latin typeface="Georgia" pitchFamily="34" charset="0"/>
+                <a:ea typeface="Georgia" pitchFamily="34" charset="-122"/>
+                <a:cs typeface="Georgia" pitchFamily="34" charset="-120"/>
+              </a:rPr>
+              <a:t>. Oxford.</a:t>
+            </a:r>
+            <a:endParaRPr lang="en-US" sz="1200" dirty="0"/>
+          </a:p>
+          <a:p>
+            <a:pPr algn="l" marL="342900" indent="-342900">
+              <a:lnSpc>
+                <a:spcPts val="1620"/>
+              </a:lnSpc>
+              <a:spcAft>
+                <a:spcPts val="300"/>
+              </a:spcAft>
+              <a:buSzPct val="100000"/>
+              <a:buChar char="•"/>
+            </a:pPr>
+            <a:r>
+              <a:rPr lang="en-US" sz="1200" b="1" dirty="0">
+                <a:solidFill>
+                  <a:srgbClr val="1A1A1A"/>
+                </a:solidFill>
+                <a:latin typeface="Georgia" pitchFamily="34" charset="0"/>
+                <a:ea typeface="Georgia" pitchFamily="34" charset="-122"/>
+                <a:cs typeface="Georgia" pitchFamily="34" charset="-120"/>
+              </a:rPr>
+              <a:t>Tier down:</a:t>
+            </a:r>
+            <a:pPr algn="l" indent="0" marL="0">
+              <a:lnSpc>
+                <a:spcPts val="1620"/>
+              </a:lnSpc>
+              <a:spcAft>
+                <a:spcPts val="300"/>
+              </a:spcAft>
+              <a:buNone/>
+            </a:pPr>
+            <a:r>
+              <a:rPr lang="en-US" sz="1200" dirty="0">
+                <a:solidFill>
+                  <a:srgbClr val="1A1A1A"/>
+                </a:solidFill>
+                <a:latin typeface="Georgia" pitchFamily="34" charset="0"/>
+                <a:ea typeface="Georgia" pitchFamily="34" charset="-122"/>
+                <a:cs typeface="Georgia" pitchFamily="34" charset="-120"/>
+              </a:rPr>
+              <a:t> Memorise the 6 names + central question of each.</a:t>
+            </a:r>
+            <a:endParaRPr lang="en-US" sz="1200" dirty="0"/>
+          </a:p>
+        </p:txBody>
+      </p:sp>
+      <p:sp>
+        <p:nvSpPr>
+          <p:cNvPr id="5" name="Text 3"/>
+          <p:cNvSpPr/>
+          <p:nvPr/>
+        </p:nvSpPr>
+        <p:spPr>
+          <a:xfrm>
+            <a:off x="406301" y="4434929"/>
+            <a:ext cx="8498026" cy="213271"/>
+          </a:xfrm>
+          <a:prstGeom prst="rect">
+            <a:avLst/>
+          </a:prstGeom>
+          <a:noFill/>
+          <a:ln/>
+        </p:spPr>
+        <p:txBody>
+          <a:bodyPr wrap="square" lIns="0" tIns="0" rIns="0" bIns="0" rtlCol="0" anchor="t"/>
+          <a:lstStyle/>
+          <a:p>
+            <a:pPr algn="l" indent="0" marL="0">
+              <a:lnSpc>
+                <a:spcPts val="1680"/>
+              </a:lnSpc>
+              <a:spcBef>
+                <a:spcPts val="300"/>
+              </a:spcBef>
+              <a:spcAft>
+                <a:spcPts val="300"/>
+              </a:spcAft>
+              <a:buNone/>
+            </a:pPr>
+            <a:r>
+              <a:rPr lang="en-US" sz="1200" dirty="0">
+                <a:solidFill>
+                  <a:srgbClr val="1A1A1A"/>
+                </a:solidFill>
+                <a:latin typeface="Georgia" pitchFamily="34" charset="0"/>
+                <a:ea typeface="Georgia" pitchFamily="34" charset="-122"/>
+                <a:cs typeface="Georgia" pitchFamily="34" charset="-120"/>
+              </a:rPr>
+              <a:t>Senior ·  · IKS Curriculum</a:t>
+            </a:r>
+            <a:endParaRPr lang="en-US" sz="1200" dirty="0"/>
+          </a:p>
+        </p:txBody>
+      </p:sp>
+    </p:spTree>
+  </p:cSld>
+  <p:clrMapOvr>
+    <a:masterClrMapping/>
+  </p:clrMapOvr>
+</p:sld>
+</file>
+
+<file path=ppt/slides/slide13.xml><?xml version="1.0" encoding="utf-8"?>
+<p:sld xmlns:a="http://schemas.openxmlformats.org/drawingml/2006/main" xmlns:r="http://schemas.openxmlformats.org/officeDocument/2006/relationships" xmlns:p="http://schemas.openxmlformats.org/presentationml/2006/main">
+  <p:cSld name="Slide 13">
+    <p:bg>
+      <p:bgPr>
+        <a:solidFill>
+          <a:srgbClr val="FAF7F2"/>
+        </a:solidFill>
+      </p:bgPr>
+    </p:bg>
+    <p:spTree>
+      <p:nvGrpSpPr>
+        <p:cNvPr id="1" name=""/>
+        <p:cNvGrpSpPr/>
+        <p:nvPr/>
+      </p:nvGrpSpPr>
+      <p:grpSpPr>
+        <a:xfrm>
+          <a:off x="0" y="0"/>
+          <a:ext cx="0" cy="0"/>
+          <a:chOff x="0" y="0"/>
+          <a:chExt cx="0" cy="0"/>
+        </a:xfrm>
+      </p:grpSpPr>
+      <p:sp>
+        <p:nvSpPr>
+          <p:cNvPr id="2" name="Text 0"/>
+          <p:cNvSpPr/>
+          <p:nvPr/>
+        </p:nvSpPr>
+        <p:spPr>
+          <a:xfrm>
+            <a:off x="0" y="0"/>
+            <a:ext cx="9144000" cy="101501"/>
+          </a:xfrm>
+          <a:prstGeom prst="rect">
+            <a:avLst/>
+          </a:prstGeom>
+          <a:solidFill>
+            <a:srgbClr val="5D1D2E"/>
+          </a:solidFill>
+          <a:ln/>
+        </p:spPr>
+        <p:txBody>
+          <a:bodyPr wrap="square" rtlCol="0" anchor="ctr"/>
+          <a:lstStyle/>
+          <a:p>
+            <a:pPr indent="0" marL="0">
+              <a:buNone/>
+            </a:pPr>
+            <a:endParaRPr lang="en-US" dirty="0"/>
+          </a:p>
+        </p:txBody>
+      </p:sp>
+      <p:sp>
+        <p:nvSpPr>
+          <p:cNvPr id="3" name="Text 1"/>
+          <p:cNvSpPr/>
+          <p:nvPr/>
+        </p:nvSpPr>
+        <p:spPr>
+          <a:xfrm>
+            <a:off x="406301" y="457051"/>
+            <a:ext cx="8498026" cy="274290"/>
+          </a:xfrm>
+          <a:prstGeom prst="rect">
+            <a:avLst/>
+          </a:prstGeom>
+          <a:noFill/>
+          <a:ln/>
+        </p:spPr>
+        <p:txBody>
+          <a:bodyPr wrap="square" lIns="0" tIns="0" rIns="0" bIns="0" rtlCol="0" anchor="t"/>
+          <a:lstStyle/>
+          <a:p>
+            <a:pPr algn="l" indent="0" marL="0">
+              <a:lnSpc>
+                <a:spcPts val="2160"/>
+              </a:lnSpc>
+              <a:spcBef>
+                <a:spcPts val="600"/>
+              </a:spcBef>
+              <a:spcAft>
+                <a:spcPts val="800"/>
+              </a:spcAft>
+              <a:buNone/>
+            </a:pPr>
+            <a:r>
+              <a:rPr lang="en-US" sz="1800" b="1" dirty="0">
+                <a:solidFill>
+                  <a:srgbClr val="997929"/>
+                </a:solidFill>
+                <a:latin typeface="Times New Roman" pitchFamily="34" charset="0"/>
+                <a:ea typeface="Times New Roman" pitchFamily="34" charset="-122"/>
+                <a:cs typeface="Times New Roman" pitchFamily="34" charset="-120"/>
+              </a:rPr>
+              <a:t>Teacher notes</a:t>
+            </a:r>
+            <a:endParaRPr lang="en-US" sz="1800" dirty="0"/>
+          </a:p>
+        </p:txBody>
+      </p:sp>
+      <p:sp>
+        <p:nvSpPr>
+          <p:cNvPr id="4" name="Text 2"/>
+          <p:cNvSpPr/>
+          <p:nvPr/>
+        </p:nvSpPr>
+        <p:spPr>
+          <a:xfrm>
+            <a:off x="634901" y="883593"/>
+            <a:ext cx="8102798" cy="487561"/>
+          </a:xfrm>
+          <a:prstGeom prst="rect">
+            <a:avLst/>
+          </a:prstGeom>
+          <a:noFill/>
+          <a:ln/>
+        </p:spPr>
+        <p:txBody>
+          <a:bodyPr wrap="square" lIns="0" tIns="0" rIns="0" bIns="0" rtlCol="0" anchor="t"/>
+          <a:lstStyle/>
+          <a:p>
+            <a:pPr algn="l" marL="342900" indent="-342900">
+              <a:lnSpc>
+                <a:spcPts val="1620"/>
+              </a:lnSpc>
+              <a:spcAft>
+                <a:spcPts val="300"/>
+              </a:spcAft>
+              <a:buSzPct val="100000"/>
+              <a:buChar char="•"/>
+            </a:pPr>
+            <a:r>
+              <a:rPr lang="en-US" sz="1200" dirty="0">
+                <a:solidFill>
+                  <a:srgbClr val="1A1A1A"/>
+                </a:solidFill>
+                <a:latin typeface="Georgia" pitchFamily="34" charset="0"/>
+                <a:ea typeface="Georgia" pitchFamily="34" charset="-122"/>
+                <a:cs typeface="Georgia" pitchFamily="34" charset="-120"/>
+              </a:rPr>
+              <a:t>The "āstika vs nāstika" distinction is important. Buddhism and Jainism are ENORMOUS Indian intellectual traditions excluded from a narrow "IKS" definition. Honest scholarship acknowledges this.</a:t>
+            </a:r>
+            <a:endParaRPr lang="en-US" sz="1200" dirty="0"/>
+          </a:p>
+        </p:txBody>
+      </p:sp>
+      <p:sp>
+        <p:nvSpPr>
+          <p:cNvPr id="5" name="Text 3"/>
+          <p:cNvSpPr/>
+          <p:nvPr/>
+        </p:nvSpPr>
+        <p:spPr>
+          <a:xfrm>
+            <a:off x="406301" y="4434929"/>
+            <a:ext cx="8498026" cy="213271"/>
+          </a:xfrm>
+          <a:prstGeom prst="rect">
+            <a:avLst/>
+          </a:prstGeom>
+          <a:noFill/>
+          <a:ln/>
+        </p:spPr>
+        <p:txBody>
+          <a:bodyPr wrap="square" lIns="0" tIns="0" rIns="0" bIns="0" rtlCol="0" anchor="t"/>
+          <a:lstStyle/>
+          <a:p>
+            <a:pPr algn="l" indent="0" marL="0">
+              <a:lnSpc>
+                <a:spcPts val="1680"/>
+              </a:lnSpc>
+              <a:spcBef>
+                <a:spcPts val="300"/>
+              </a:spcBef>
+              <a:spcAft>
+                <a:spcPts val="300"/>
+              </a:spcAft>
+              <a:buNone/>
+            </a:pPr>
+            <a:r>
+              <a:rPr lang="en-US" sz="1200" dirty="0">
+                <a:solidFill>
+                  <a:srgbClr val="1A1A1A"/>
+                </a:solidFill>
+                <a:latin typeface="Georgia" pitchFamily="34" charset="0"/>
+                <a:ea typeface="Georgia" pitchFamily="34" charset="-122"/>
+                <a:cs typeface="Georgia" pitchFamily="34" charset="-120"/>
+              </a:rPr>
+              <a:t>Senior ·  · IKS Curriculum</a:t>
+            </a:r>
+            <a:endParaRPr lang="en-US" sz="1200" dirty="0"/>
+          </a:p>
+        </p:txBody>
+      </p:sp>
+    </p:spTree>
+  </p:cSld>
+  <p:clrMapOvr>
+    <a:masterClrMapping/>
+  </p:clrMapOvr>
+</p:sld>
+</file>
+
+<file path=ppt/slides/slide14.xml><?xml version="1.0" encoding="utf-8"?>
+<p:sld xmlns:a="http://schemas.openxmlformats.org/drawingml/2006/main" xmlns:r="http://schemas.openxmlformats.org/officeDocument/2006/relationships" xmlns:p="http://schemas.openxmlformats.org/presentationml/2006/main">
+  <p:cSld name="Slide 14">
+    <p:bg>
+      <p:bgPr>
+        <a:solidFill>
+          <a:srgbClr val="FAF7F2"/>
+        </a:solidFill>
+      </p:bgPr>
+    </p:bg>
+    <p:spTree>
+      <p:nvGrpSpPr>
+        <p:cNvPr id="1" name=""/>
+        <p:cNvGrpSpPr/>
+        <p:nvPr/>
+      </p:nvGrpSpPr>
+      <p:grpSpPr>
+        <a:xfrm>
+          <a:off x="0" y="0"/>
+          <a:ext cx="0" cy="0"/>
+          <a:chOff x="0" y="0"/>
+          <a:chExt cx="0" cy="0"/>
+        </a:xfrm>
+      </p:grpSpPr>
+      <p:sp>
+        <p:nvSpPr>
+          <p:cNvPr id="2" name="Text 0"/>
+          <p:cNvSpPr/>
+          <p:nvPr/>
+        </p:nvSpPr>
+        <p:spPr>
+          <a:xfrm>
+            <a:off x="0" y="0"/>
+            <a:ext cx="9144000" cy="101501"/>
+          </a:xfrm>
+          <a:prstGeom prst="rect">
+            <a:avLst/>
+          </a:prstGeom>
+          <a:solidFill>
+            <a:srgbClr val="5D1D2E"/>
+          </a:solidFill>
+          <a:ln/>
+        </p:spPr>
+        <p:txBody>
+          <a:bodyPr wrap="square" rtlCol="0" anchor="ctr"/>
+          <a:lstStyle/>
+          <a:p>
+            <a:pPr indent="0" marL="0">
+              <a:buNone/>
+            </a:pPr>
+            <a:endParaRPr lang="en-US" dirty="0"/>
+          </a:p>
+        </p:txBody>
+      </p:sp>
+      <p:sp>
+        <p:nvSpPr>
+          <p:cNvPr id="3" name="Text 1"/>
+          <p:cNvSpPr/>
+          <p:nvPr/>
+        </p:nvSpPr>
+        <p:spPr>
+          <a:xfrm>
+            <a:off x="406301" y="457051"/>
+            <a:ext cx="8498026" cy="274290"/>
+          </a:xfrm>
+          <a:prstGeom prst="rect">
+            <a:avLst/>
+          </a:prstGeom>
+          <a:noFill/>
+          <a:ln/>
+        </p:spPr>
+        <p:txBody>
+          <a:bodyPr wrap="square" lIns="0" tIns="0" rIns="0" bIns="0" rtlCol="0" anchor="t"/>
+          <a:lstStyle/>
+          <a:p>
+            <a:pPr algn="l" indent="0" marL="0">
+              <a:lnSpc>
+                <a:spcPts val="2160"/>
+              </a:lnSpc>
+              <a:spcBef>
+                <a:spcPts val="600"/>
+              </a:spcBef>
+              <a:spcAft>
+                <a:spcPts val="800"/>
+              </a:spcAft>
+              <a:buNone/>
+            </a:pPr>
+            <a:r>
+              <a:rPr lang="en-US" sz="1800" b="1" dirty="0">
+                <a:solidFill>
+                  <a:srgbClr val="997929"/>
+                </a:solidFill>
+                <a:latin typeface="Times New Roman" pitchFamily="34" charset="0"/>
+                <a:ea typeface="Times New Roman" pitchFamily="34" charset="-122"/>
+                <a:cs typeface="Times New Roman" pitchFamily="34" charset="-120"/>
+              </a:rPr>
+              <a:t>Citation(s) used</a:t>
+            </a:r>
+            <a:endParaRPr lang="en-US" sz="1800" dirty="0"/>
+          </a:p>
+        </p:txBody>
+      </p:sp>
+      <p:sp>
+        <p:nvSpPr>
+          <p:cNvPr id="4" name="Text 2"/>
+          <p:cNvSpPr/>
+          <p:nvPr/>
+        </p:nvSpPr>
+        <p:spPr>
+          <a:xfrm>
+            <a:off x="634901" y="883593"/>
+            <a:ext cx="8102798" cy="769441"/>
+          </a:xfrm>
+          <a:prstGeom prst="rect">
+            <a:avLst/>
+          </a:prstGeom>
+          <a:noFill/>
+          <a:ln/>
+        </p:spPr>
+        <p:txBody>
+          <a:bodyPr wrap="square" lIns="0" tIns="0" rIns="0" bIns="0" rtlCol="0" anchor="t"/>
+          <a:lstStyle/>
+          <a:p>
+            <a:pPr algn="l" marL="342900" indent="-342900">
+              <a:lnSpc>
+                <a:spcPts val="1620"/>
+              </a:lnSpc>
+              <a:spcAft>
+                <a:spcPts val="300"/>
+              </a:spcAft>
+              <a:buSzPct val="100000"/>
+              <a:buChar char="•"/>
+            </a:pPr>
+            <a:r>
+              <a:rPr lang="en-US" sz="1200" dirty="0">
+                <a:solidFill>
+                  <a:srgbClr val="1A1A1A"/>
+                </a:solidFill>
+                <a:latin typeface="Georgia" pitchFamily="34" charset="0"/>
+                <a:ea typeface="Georgia" pitchFamily="34" charset="-122"/>
+                <a:cs typeface="Georgia" pitchFamily="34" charset="-120"/>
+              </a:rPr>
+              <a:t>Olivelle (1996, ed.) on the Upanishadic background.</a:t>
+            </a:r>
+            <a:endParaRPr lang="en-US" sz="1200" dirty="0"/>
+          </a:p>
+          <a:p>
+            <a:pPr algn="l" marL="342900" indent="-342900">
+              <a:lnSpc>
+                <a:spcPts val="1620"/>
+              </a:lnSpc>
+              <a:spcAft>
+                <a:spcPts val="300"/>
+              </a:spcAft>
+              <a:buSzPct val="100000"/>
+              <a:buChar char="•"/>
+            </a:pPr>
+            <a:r>
+              <a:rPr lang="en-US" sz="1200" dirty="0">
+                <a:solidFill>
+                  <a:srgbClr val="1A1A1A"/>
+                </a:solidFill>
+                <a:latin typeface="Georgia" pitchFamily="34" charset="0"/>
+                <a:ea typeface="Georgia" pitchFamily="34" charset="-122"/>
+                <a:cs typeface="Georgia" pitchFamily="34" charset="-120"/>
+              </a:rPr>
+              <a:t>Matilal (1986) for Nyāya logic.</a:t>
+            </a:r>
+            <a:endParaRPr lang="en-US" sz="1200" dirty="0"/>
+          </a:p>
+          <a:p>
+            <a:pPr algn="l" marL="342900" indent="-342900">
+              <a:lnSpc>
+                <a:spcPts val="1620"/>
+              </a:lnSpc>
+              <a:spcAft>
+                <a:spcPts val="300"/>
+              </a:spcAft>
+              <a:buSzPct val="100000"/>
+              <a:buChar char="•"/>
+            </a:pPr>
+            <a:r>
+              <a:rPr lang="en-US" sz="1200" dirty="0">
+                <a:solidFill>
+                  <a:srgbClr val="1A1A1A"/>
+                </a:solidFill>
+                <a:latin typeface="Georgia" pitchFamily="34" charset="0"/>
+                <a:ea typeface="Georgia" pitchFamily="34" charset="-122"/>
+                <a:cs typeface="Georgia" pitchFamily="34" charset="-120"/>
+              </a:rPr>
+              <a:t>Bryant (2009) for Yoga.</a:t>
             </a:r>
             <a:endParaRPr lang="en-US" sz="1200" dirty="0"/>
           </a:p>
@@ -2322,7 +3688,7 @@
                 <a:ea typeface="Times New Roman" pitchFamily="34" charset="-122"/>
                 <a:cs typeface="Times New Roman" pitchFamily="34" charset="-120"/>
               </a:rPr>
-              <a:t>Materials</a:t>
+              <a:t>Learning objective</a:t>
             </a:r>
             <a:endParaRPr lang="en-US" sz="1800" dirty="0"/>
           </a:p>
@@ -2370,7 +3736,7 @@
                 <a:ea typeface="Georgia" pitchFamily="34" charset="-122"/>
                 <a:cs typeface="Georgia" pitchFamily="34" charset="-120"/>
               </a:rPr>
-              <a:t>– Whiteboard – Reference card with the six darśanas</a:t>
+              <a:t>Students name the six classical philosophical schools (darśanas) and the central question each addresses.</a:t>
             </a:r>
             <a:endParaRPr lang="en-US" sz="1200" dirty="0"/>
           </a:p>
@@ -2528,7 +3894,7 @@
                 <a:ea typeface="Times New Roman" pitchFamily="34" charset="-122"/>
                 <a:cs typeface="Times New Roman" pitchFamily="34" charset="-120"/>
               </a:rPr>
-              <a:t>Flow</a:t>
+              <a:t>Materials</a:t>
             </a:r>
             <a:endParaRPr lang="en-US" sz="1800" dirty="0"/>
           </a:p>
@@ -2537,6 +3903,76 @@
       <p:sp>
         <p:nvSpPr>
           <p:cNvPr id="4" name="Text 2"/>
+          <p:cNvSpPr/>
+          <p:nvPr/>
+        </p:nvSpPr>
+        <p:spPr>
+          <a:xfrm>
+            <a:off x="634901" y="883593"/>
+            <a:ext cx="8102798" cy="525661"/>
+          </a:xfrm>
+          <a:prstGeom prst="rect">
+            <a:avLst/>
+          </a:prstGeom>
+          <a:noFill/>
+          <a:ln/>
+        </p:spPr>
+        <p:txBody>
+          <a:bodyPr wrap="square" lIns="0" tIns="0" rIns="0" bIns="0" rtlCol="0" anchor="t"/>
+          <a:lstStyle/>
+          <a:p>
+            <a:pPr algn="l" marL="342900" indent="-342900">
+              <a:lnSpc>
+                <a:spcPts val="1620"/>
+              </a:lnSpc>
+              <a:spcAft>
+                <a:spcPts val="300"/>
+              </a:spcAft>
+              <a:buSzPct val="100000"/>
+              <a:buChar char="•"/>
+            </a:pPr>
+            <a:r>
+              <a:rPr lang="en-US" sz="1200" dirty="0">
+                <a:solidFill>
+                  <a:srgbClr val="1A1A1A"/>
+                </a:solidFill>
+                <a:latin typeface="Georgia" pitchFamily="34" charset="0"/>
+                <a:ea typeface="Georgia" pitchFamily="34" charset="-122"/>
+                <a:cs typeface="Georgia" pitchFamily="34" charset="-120"/>
+              </a:rPr>
+              <a:t>Whiteboard</a:t>
+            </a:r>
+            <a:endParaRPr lang="en-US" sz="1200" dirty="0"/>
+          </a:p>
+          <a:p>
+            <a:pPr algn="l" marL="342900" indent="-342900">
+              <a:lnSpc>
+                <a:spcPts val="1620"/>
+              </a:lnSpc>
+              <a:spcAft>
+                <a:spcPts val="300"/>
+              </a:spcAft>
+              <a:buSzPct val="100000"/>
+              <a:buChar char="•"/>
+            </a:pPr>
+            <a:r>
+              <a:rPr lang="en-US" sz="1200" dirty="0">
+                <a:solidFill>
+                  <a:srgbClr val="1A1A1A"/>
+                </a:solidFill>
+                <a:latin typeface="Georgia" pitchFamily="34" charset="0"/>
+                <a:ea typeface="Georgia" pitchFamily="34" charset="-122"/>
+                <a:cs typeface="Georgia" pitchFamily="34" charset="-120"/>
+              </a:rPr>
+              <a:t>Reference card with the six darśanas</a:t>
+            </a:r>
+            <a:endParaRPr lang="en-US" sz="1200" dirty="0"/>
+          </a:p>
+        </p:txBody>
+      </p:sp>
+      <p:sp>
+        <p:nvSpPr>
+          <p:cNvPr id="5" name="Text 3"/>
           <p:cNvSpPr/>
           <p:nvPr/>
         </p:nvSpPr>
@@ -2686,7 +4122,7 @@
                 <a:ea typeface="Times New Roman" pitchFamily="34" charset="-122"/>
                 <a:cs typeface="Times New Roman" pitchFamily="34" charset="-120"/>
               </a:rPr>
-              <a:t>Warm-up (5 min)</a:t>
+              <a:t>Flow</a:t>
             </a:r>
             <a:endParaRPr lang="en-US" sz="1800" dirty="0"/>
           </a:p>
@@ -2695,54 +4131,6 @@
       <p:sp>
         <p:nvSpPr>
           <p:cNvPr id="4" name="Text 2"/>
-          <p:cNvSpPr/>
-          <p:nvPr/>
-        </p:nvSpPr>
-        <p:spPr>
-          <a:xfrm>
-            <a:off x="406301" y="870942"/>
-            <a:ext cx="8498026" cy="213271"/>
-          </a:xfrm>
-          <a:prstGeom prst="rect">
-            <a:avLst/>
-          </a:prstGeom>
-          <a:noFill/>
-          <a:ln/>
-        </p:spPr>
-        <p:txBody>
-          <a:bodyPr wrap="square" lIns="0" tIns="0" rIns="0" bIns="0" rtlCol="0" anchor="t"/>
-          <a:lstStyle/>
-          <a:p>
-            <a:pPr algn="l" indent="0" marL="0">
-              <a:lnSpc>
-                <a:spcPts val="1680"/>
-              </a:lnSpc>
-              <a:spcBef>
-                <a:spcPts val="300"/>
-              </a:spcBef>
-              <a:spcAft>
-                <a:spcPts val="300"/>
-              </a:spcAft>
-              <a:buNone/>
-            </a:pPr>
-            <a:r>
-              <a:rPr lang="en-US" sz="1200" dirty="0">
-                <a:solidFill>
-                  <a:srgbClr val="1A1A1A"/>
-                </a:solidFill>
-                <a:latin typeface="Georgia" pitchFamily="34" charset="0"/>
-                <a:ea typeface="Georgia" pitchFamily="34" charset="-122"/>
-                <a:cs typeface="Georgia" pitchFamily="34" charset="-120"/>
-              </a:rPr>
-              <a:t>Recall: what's the difference between Vedānga and Upaveda?</a:t>
-            </a:r>
-            <a:endParaRPr lang="en-US" sz="1200" dirty="0"/>
-          </a:p>
-        </p:txBody>
-      </p:sp>
-      <p:sp>
-        <p:nvSpPr>
-          <p:cNvPr id="5" name="Text 3"/>
           <p:cNvSpPr/>
           <p:nvPr/>
         </p:nvSpPr>
@@ -2892,7 +4280,7 @@
                 <a:ea typeface="Times New Roman" pitchFamily="34" charset="-122"/>
                 <a:cs typeface="Times New Roman" pitchFamily="34" charset="-120"/>
               </a:rPr>
-              <a:t>Core (25 min)</a:t>
+              <a:t>Warm-up (5 min)</a:t>
             </a:r>
             <a:endParaRPr lang="en-US" sz="1800" dirty="0"/>
           </a:p>
@@ -2932,29 +4320,6 @@
               <a:buNone/>
             </a:pPr>
             <a:r>
-              <a:rPr lang="en-US" sz="1200" b="1" dirty="0">
-                <a:solidFill>
-                  <a:srgbClr val="1A1A1A"/>
-                </a:solidFill>
-                <a:latin typeface="Georgia" pitchFamily="34" charset="0"/>
-                <a:ea typeface="Georgia" pitchFamily="34" charset="-122"/>
-                <a:cs typeface="Georgia" pitchFamily="34" charset="-120"/>
-              </a:rPr>
-              <a:t>The Six Darśanas</a:t>
-            </a:r>
-            <a:pPr algn="l" indent="0" marL="0">
-              <a:lnSpc>
-                <a:spcPts val="1680"/>
-              </a:lnSpc>
-              <a:spcBef>
-                <a:spcPts val="300"/>
-              </a:spcBef>
-              <a:spcAft>
-                <a:spcPts val="300"/>
-              </a:spcAft>
-              <a:buNone/>
-            </a:pPr>
-            <a:r>
               <a:rPr lang="en-US" sz="1200" dirty="0">
                 <a:solidFill>
                   <a:srgbClr val="1A1A1A"/>
@@ -2963,7 +4328,7 @@
                 <a:ea typeface="Georgia" pitchFamily="34" charset="-122"/>
                 <a:cs typeface="Georgia" pitchFamily="34" charset="-120"/>
               </a:rPr>
-              <a:t> (classical philosophical systems, codified ~early CE):</a:t>
+              <a:t>Recall: what's the difference between Vedānga and Upaveda?</a:t>
             </a:r>
             <a:endParaRPr lang="en-US" sz="1200" dirty="0"/>
           </a:p>
@@ -2977,1138 +4342,7 @@
         </p:nvSpPr>
         <p:spPr>
           <a:xfrm>
-            <a:off x="406301" y="1160413"/>
-            <a:ext cx="8498026" cy="213271"/>
-          </a:xfrm>
-          <a:prstGeom prst="rect">
-            <a:avLst/>
-          </a:prstGeom>
-          <a:noFill/>
-          <a:ln/>
-        </p:spPr>
-        <p:txBody>
-          <a:bodyPr wrap="square" lIns="0" tIns="0" rIns="0" bIns="0" rtlCol="0" anchor="t"/>
-          <a:lstStyle/>
-          <a:p>
-            <a:pPr algn="l" indent="0" marL="0">
-              <a:lnSpc>
-                <a:spcPts val="1680"/>
-              </a:lnSpc>
-              <a:spcBef>
-                <a:spcPts val="300"/>
-              </a:spcBef>
-              <a:spcAft>
-                <a:spcPts val="300"/>
-              </a:spcAft>
-              <a:buNone/>
-            </a:pPr>
-            <a:r>
-              <a:rPr lang="en-US" sz="1200" i="1" dirty="0">
-                <a:solidFill>
-                  <a:srgbClr val="1A1A1A"/>
-                </a:solidFill>
-                <a:latin typeface="Georgia" pitchFamily="34" charset="0"/>
-                <a:ea typeface="Georgia" pitchFamily="34" charset="-122"/>
-                <a:cs typeface="Georgia" pitchFamily="34" charset="-120"/>
-              </a:rPr>
-              <a:t>Each row: # · Sanskrit · Central question · Founder/text.</a:t>
-            </a:r>
-            <a:endParaRPr lang="en-US" sz="1200" dirty="0"/>
-          </a:p>
-        </p:txBody>
-      </p:sp>
-      <p:sp>
-        <p:nvSpPr>
-          <p:cNvPr id="6" name="Text 4"/>
-          <p:cNvSpPr/>
-          <p:nvPr/>
-        </p:nvSpPr>
-        <p:spPr>
-          <a:xfrm>
-            <a:off x="634901" y="1462534"/>
-            <a:ext cx="8102798" cy="1706463"/>
-          </a:xfrm>
-          <a:prstGeom prst="rect">
-            <a:avLst/>
-          </a:prstGeom>
-          <a:noFill/>
-          <a:ln/>
-        </p:spPr>
-        <p:txBody>
-          <a:bodyPr wrap="square" lIns="0" tIns="0" rIns="0" bIns="0" rtlCol="0" anchor="t"/>
-          <a:lstStyle/>
-          <a:p>
-            <a:pPr algn="l" marL="342900" indent="-342900">
-              <a:lnSpc>
-                <a:spcPts val="1620"/>
-              </a:lnSpc>
-              <a:spcAft>
-                <a:spcPts val="300"/>
-              </a:spcAft>
-              <a:buSzPct val="100000"/>
-              <a:buChar char="•"/>
-            </a:pPr>
-            <a:r>
-              <a:rPr lang="en-US" sz="1200" b="1" dirty="0">
-                <a:solidFill>
-                  <a:srgbClr val="1A1A1A"/>
-                </a:solidFill>
-                <a:latin typeface="Georgia" pitchFamily="34" charset="0"/>
-                <a:ea typeface="Georgia" pitchFamily="34" charset="-122"/>
-                <a:cs typeface="Georgia" pitchFamily="34" charset="-120"/>
-              </a:rPr>
-              <a:t>1</a:t>
-            </a:r>
-            <a:pPr algn="l" indent="0" marL="0">
-              <a:lnSpc>
-                <a:spcPts val="1620"/>
-              </a:lnSpc>
-              <a:spcAft>
-                <a:spcPts val="300"/>
-              </a:spcAft>
-              <a:buNone/>
-            </a:pPr>
-            <a:r>
-              <a:rPr lang="en-US" sz="1200" dirty="0">
-                <a:solidFill>
-                  <a:srgbClr val="1A1A1A"/>
-                </a:solidFill>
-                <a:latin typeface="Georgia" pitchFamily="34" charset="0"/>
-                <a:ea typeface="Georgia" pitchFamily="34" charset="-122"/>
-                <a:cs typeface="Georgia" pitchFamily="34" charset="-120"/>
-              </a:rPr>
-              <a:t> — </a:t>
-            </a:r>
-            <a:pPr algn="l" indent="0" marL="0">
-              <a:lnSpc>
-                <a:spcPts val="1620"/>
-              </a:lnSpc>
-              <a:spcAft>
-                <a:spcPts val="300"/>
-              </a:spcAft>
-              <a:buNone/>
-            </a:pPr>
-            <a:r>
-              <a:rPr lang="en-US" sz="1200" i="1" dirty="0">
-                <a:solidFill>
-                  <a:srgbClr val="1A1A1A"/>
-                </a:solidFill>
-                <a:latin typeface="Georgia" pitchFamily="34" charset="0"/>
-                <a:ea typeface="Georgia" pitchFamily="34" charset="-122"/>
-                <a:cs typeface="Georgia" pitchFamily="34" charset="-120"/>
-              </a:rPr>
-              <a:t>Nyāya</a:t>
-            </a:r>
-            <a:pPr algn="l" indent="0" marL="0">
-              <a:lnSpc>
-                <a:spcPts val="1620"/>
-              </a:lnSpc>
-              <a:spcAft>
-                <a:spcPts val="300"/>
-              </a:spcAft>
-              <a:buNone/>
-            </a:pPr>
-            <a:r>
-              <a:rPr lang="en-US" sz="1200" dirty="0">
-                <a:solidFill>
-                  <a:srgbClr val="1A1A1A"/>
-                </a:solidFill>
-                <a:latin typeface="Georgia" pitchFamily="34" charset="0"/>
-                <a:ea typeface="Georgia" pitchFamily="34" charset="-122"/>
-                <a:cs typeface="Georgia" pitchFamily="34" charset="-120"/>
-              </a:rPr>
-              <a:t> · Logic &amp; epistemology — what counts as valid knowledge? · Gautama, </a:t>
-            </a:r>
-            <a:pPr algn="l" indent="0" marL="0">
-              <a:lnSpc>
-                <a:spcPts val="1620"/>
-              </a:lnSpc>
-              <a:spcAft>
-                <a:spcPts val="300"/>
-              </a:spcAft>
-              <a:buNone/>
-            </a:pPr>
-            <a:r>
-              <a:rPr lang="en-US" sz="1200" i="1" dirty="0">
-                <a:solidFill>
-                  <a:srgbClr val="1A1A1A"/>
-                </a:solidFill>
-                <a:latin typeface="Georgia" pitchFamily="34" charset="0"/>
-                <a:ea typeface="Georgia" pitchFamily="34" charset="-122"/>
-                <a:cs typeface="Georgia" pitchFamily="34" charset="-120"/>
-              </a:rPr>
-              <a:t>Nyāya Sūtras</a:t>
-            </a:r>
-            <a:endParaRPr lang="en-US" sz="1200" dirty="0"/>
-          </a:p>
-          <a:p>
-            <a:pPr algn="l" marL="342900" indent="-342900">
-              <a:lnSpc>
-                <a:spcPts val="1620"/>
-              </a:lnSpc>
-              <a:spcAft>
-                <a:spcPts val="300"/>
-              </a:spcAft>
-              <a:buSzPct val="100000"/>
-              <a:buChar char="•"/>
-            </a:pPr>
-            <a:r>
-              <a:rPr lang="en-US" sz="1200" b="1" dirty="0">
-                <a:solidFill>
-                  <a:srgbClr val="1A1A1A"/>
-                </a:solidFill>
-                <a:latin typeface="Georgia" pitchFamily="34" charset="0"/>
-                <a:ea typeface="Georgia" pitchFamily="34" charset="-122"/>
-                <a:cs typeface="Georgia" pitchFamily="34" charset="-120"/>
-              </a:rPr>
-              <a:t>2</a:t>
-            </a:r>
-            <a:pPr algn="l" indent="0" marL="0">
-              <a:lnSpc>
-                <a:spcPts val="1620"/>
-              </a:lnSpc>
-              <a:spcAft>
-                <a:spcPts val="300"/>
-              </a:spcAft>
-              <a:buNone/>
-            </a:pPr>
-            <a:r>
-              <a:rPr lang="en-US" sz="1200" dirty="0">
-                <a:solidFill>
-                  <a:srgbClr val="1A1A1A"/>
-                </a:solidFill>
-                <a:latin typeface="Georgia" pitchFamily="34" charset="0"/>
-                <a:ea typeface="Georgia" pitchFamily="34" charset="-122"/>
-                <a:cs typeface="Georgia" pitchFamily="34" charset="-120"/>
-              </a:rPr>
-              <a:t> — </a:t>
-            </a:r>
-            <a:pPr algn="l" indent="0" marL="0">
-              <a:lnSpc>
-                <a:spcPts val="1620"/>
-              </a:lnSpc>
-              <a:spcAft>
-                <a:spcPts val="300"/>
-              </a:spcAft>
-              <a:buNone/>
-            </a:pPr>
-            <a:r>
-              <a:rPr lang="en-US" sz="1200" i="1" dirty="0">
-                <a:solidFill>
-                  <a:srgbClr val="1A1A1A"/>
-                </a:solidFill>
-                <a:latin typeface="Georgia" pitchFamily="34" charset="0"/>
-                <a:ea typeface="Georgia" pitchFamily="34" charset="-122"/>
-                <a:cs typeface="Georgia" pitchFamily="34" charset="-120"/>
-              </a:rPr>
-              <a:t>Vaiśeṣika</a:t>
-            </a:r>
-            <a:pPr algn="l" indent="0" marL="0">
-              <a:lnSpc>
-                <a:spcPts val="1620"/>
-              </a:lnSpc>
-              <a:spcAft>
-                <a:spcPts val="300"/>
-              </a:spcAft>
-              <a:buNone/>
-            </a:pPr>
-            <a:r>
-              <a:rPr lang="en-US" sz="1200" dirty="0">
-                <a:solidFill>
-                  <a:srgbClr val="1A1A1A"/>
-                </a:solidFill>
-                <a:latin typeface="Georgia" pitchFamily="34" charset="0"/>
-                <a:ea typeface="Georgia" pitchFamily="34" charset="-122"/>
-                <a:cs typeface="Georgia" pitchFamily="34" charset="-120"/>
-              </a:rPr>
-              <a:t> · Atomism &amp; metaphysics — what categories of being exist? · Kaṇāda, </a:t>
-            </a:r>
-            <a:pPr algn="l" indent="0" marL="0">
-              <a:lnSpc>
-                <a:spcPts val="1620"/>
-              </a:lnSpc>
-              <a:spcAft>
-                <a:spcPts val="300"/>
-              </a:spcAft>
-              <a:buNone/>
-            </a:pPr>
-            <a:r>
-              <a:rPr lang="en-US" sz="1200" i="1" dirty="0">
-                <a:solidFill>
-                  <a:srgbClr val="1A1A1A"/>
-                </a:solidFill>
-                <a:latin typeface="Georgia" pitchFamily="34" charset="0"/>
-                <a:ea typeface="Georgia" pitchFamily="34" charset="-122"/>
-                <a:cs typeface="Georgia" pitchFamily="34" charset="-120"/>
-              </a:rPr>
-              <a:t>Vaiśeṣika Sūtras</a:t>
-            </a:r>
-            <a:endParaRPr lang="en-US" sz="1200" dirty="0"/>
-          </a:p>
-          <a:p>
-            <a:pPr algn="l" marL="342900" indent="-342900">
-              <a:lnSpc>
-                <a:spcPts val="1620"/>
-              </a:lnSpc>
-              <a:spcAft>
-                <a:spcPts val="300"/>
-              </a:spcAft>
-              <a:buSzPct val="100000"/>
-              <a:buChar char="•"/>
-            </a:pPr>
-            <a:r>
-              <a:rPr lang="en-US" sz="1200" b="1" dirty="0">
-                <a:solidFill>
-                  <a:srgbClr val="1A1A1A"/>
-                </a:solidFill>
-                <a:latin typeface="Georgia" pitchFamily="34" charset="0"/>
-                <a:ea typeface="Georgia" pitchFamily="34" charset="-122"/>
-                <a:cs typeface="Georgia" pitchFamily="34" charset="-120"/>
-              </a:rPr>
-              <a:t>3</a:t>
-            </a:r>
-            <a:pPr algn="l" indent="0" marL="0">
-              <a:lnSpc>
-                <a:spcPts val="1620"/>
-              </a:lnSpc>
-              <a:spcAft>
-                <a:spcPts val="300"/>
-              </a:spcAft>
-              <a:buNone/>
-            </a:pPr>
-            <a:r>
-              <a:rPr lang="en-US" sz="1200" dirty="0">
-                <a:solidFill>
-                  <a:srgbClr val="1A1A1A"/>
-                </a:solidFill>
-                <a:latin typeface="Georgia" pitchFamily="34" charset="0"/>
-                <a:ea typeface="Georgia" pitchFamily="34" charset="-122"/>
-                <a:cs typeface="Georgia" pitchFamily="34" charset="-120"/>
-              </a:rPr>
-              <a:t> — </a:t>
-            </a:r>
-            <a:pPr algn="l" indent="0" marL="0">
-              <a:lnSpc>
-                <a:spcPts val="1620"/>
-              </a:lnSpc>
-              <a:spcAft>
-                <a:spcPts val="300"/>
-              </a:spcAft>
-              <a:buNone/>
-            </a:pPr>
-            <a:r>
-              <a:rPr lang="en-US" sz="1200" i="1" dirty="0">
-                <a:solidFill>
-                  <a:srgbClr val="1A1A1A"/>
-                </a:solidFill>
-                <a:latin typeface="Georgia" pitchFamily="34" charset="0"/>
-                <a:ea typeface="Georgia" pitchFamily="34" charset="-122"/>
-                <a:cs typeface="Georgia" pitchFamily="34" charset="-120"/>
-              </a:rPr>
-              <a:t>Sāṅkhya</a:t>
-            </a:r>
-            <a:pPr algn="l" indent="0" marL="0">
-              <a:lnSpc>
-                <a:spcPts val="1620"/>
-              </a:lnSpc>
-              <a:spcAft>
-                <a:spcPts val="300"/>
-              </a:spcAft>
-              <a:buNone/>
-            </a:pPr>
-            <a:r>
-              <a:rPr lang="en-US" sz="1200" dirty="0">
-                <a:solidFill>
-                  <a:srgbClr val="1A1A1A"/>
-                </a:solidFill>
-                <a:latin typeface="Georgia" pitchFamily="34" charset="0"/>
-                <a:ea typeface="Georgia" pitchFamily="34" charset="-122"/>
-                <a:cs typeface="Georgia" pitchFamily="34" charset="-120"/>
-              </a:rPr>
-              <a:t> · Cosmology — what are the constituents of reality? · Kapila / Īśvarakṛṣṇa, </a:t>
-            </a:r>
-            <a:pPr algn="l" indent="0" marL="0">
-              <a:lnSpc>
-                <a:spcPts val="1620"/>
-              </a:lnSpc>
-              <a:spcAft>
-                <a:spcPts val="300"/>
-              </a:spcAft>
-              <a:buNone/>
-            </a:pPr>
-            <a:r>
-              <a:rPr lang="en-US" sz="1200" i="1" dirty="0">
-                <a:solidFill>
-                  <a:srgbClr val="1A1A1A"/>
-                </a:solidFill>
-                <a:latin typeface="Georgia" pitchFamily="34" charset="0"/>
-                <a:ea typeface="Georgia" pitchFamily="34" charset="-122"/>
-                <a:cs typeface="Georgia" pitchFamily="34" charset="-120"/>
-              </a:rPr>
-              <a:t>Sāṅkhya Kārikā</a:t>
-            </a:r>
-            <a:pPr algn="l" indent="0" marL="0">
-              <a:lnSpc>
-                <a:spcPts val="1620"/>
-              </a:lnSpc>
-              <a:spcAft>
-                <a:spcPts val="300"/>
-              </a:spcAft>
-              <a:buNone/>
-            </a:pPr>
-            <a:r>
-              <a:rPr lang="en-US" sz="1200" dirty="0">
-                <a:solidFill>
-                  <a:srgbClr val="1A1A1A"/>
-                </a:solidFill>
-                <a:latin typeface="Georgia" pitchFamily="34" charset="0"/>
-                <a:ea typeface="Georgia" pitchFamily="34" charset="-122"/>
-                <a:cs typeface="Georgia" pitchFamily="34" charset="-120"/>
-              </a:rPr>
-              <a:t> (4th c. CE)</a:t>
-            </a:r>
-            <a:endParaRPr lang="en-US" sz="1200" dirty="0"/>
-          </a:p>
-          <a:p>
-            <a:pPr algn="l" marL="342900" indent="-342900">
-              <a:lnSpc>
-                <a:spcPts val="1620"/>
-              </a:lnSpc>
-              <a:spcAft>
-                <a:spcPts val="300"/>
-              </a:spcAft>
-              <a:buSzPct val="100000"/>
-              <a:buChar char="•"/>
-            </a:pPr>
-            <a:r>
-              <a:rPr lang="en-US" sz="1200" b="1" dirty="0">
-                <a:solidFill>
-                  <a:srgbClr val="1A1A1A"/>
-                </a:solidFill>
-                <a:latin typeface="Georgia" pitchFamily="34" charset="0"/>
-                <a:ea typeface="Georgia" pitchFamily="34" charset="-122"/>
-                <a:cs typeface="Georgia" pitchFamily="34" charset="-120"/>
-              </a:rPr>
-              <a:t>4</a:t>
-            </a:r>
-            <a:pPr algn="l" indent="0" marL="0">
-              <a:lnSpc>
-                <a:spcPts val="1620"/>
-              </a:lnSpc>
-              <a:spcAft>
-                <a:spcPts val="300"/>
-              </a:spcAft>
-              <a:buNone/>
-            </a:pPr>
-            <a:r>
-              <a:rPr lang="en-US" sz="1200" dirty="0">
-                <a:solidFill>
-                  <a:srgbClr val="1A1A1A"/>
-                </a:solidFill>
-                <a:latin typeface="Georgia" pitchFamily="34" charset="0"/>
-                <a:ea typeface="Georgia" pitchFamily="34" charset="-122"/>
-                <a:cs typeface="Georgia" pitchFamily="34" charset="-120"/>
-              </a:rPr>
-              <a:t> — </a:t>
-            </a:r>
-            <a:pPr algn="l" indent="0" marL="0">
-              <a:lnSpc>
-                <a:spcPts val="1620"/>
-              </a:lnSpc>
-              <a:spcAft>
-                <a:spcPts val="300"/>
-              </a:spcAft>
-              <a:buNone/>
-            </a:pPr>
-            <a:r>
-              <a:rPr lang="en-US" sz="1200" i="1" dirty="0">
-                <a:solidFill>
-                  <a:srgbClr val="1A1A1A"/>
-                </a:solidFill>
-                <a:latin typeface="Georgia" pitchFamily="34" charset="0"/>
-                <a:ea typeface="Georgia" pitchFamily="34" charset="-122"/>
-                <a:cs typeface="Georgia" pitchFamily="34" charset="-120"/>
-              </a:rPr>
-              <a:t>Yoga</a:t>
-            </a:r>
-            <a:pPr algn="l" indent="0" marL="0">
-              <a:lnSpc>
-                <a:spcPts val="1620"/>
-              </a:lnSpc>
-              <a:spcAft>
-                <a:spcPts val="300"/>
-              </a:spcAft>
-              <a:buNone/>
-            </a:pPr>
-            <a:r>
-              <a:rPr lang="en-US" sz="1200" dirty="0">
-                <a:solidFill>
-                  <a:srgbClr val="1A1A1A"/>
-                </a:solidFill>
-                <a:latin typeface="Georgia" pitchFamily="34" charset="0"/>
-                <a:ea typeface="Georgia" pitchFamily="34" charset="-122"/>
-                <a:cs typeface="Georgia" pitchFamily="34" charset="-120"/>
-              </a:rPr>
-              <a:t> · Practice — how does one settle the mind? · Patañjali, </a:t>
-            </a:r>
-            <a:pPr algn="l" indent="0" marL="0">
-              <a:lnSpc>
-                <a:spcPts val="1620"/>
-              </a:lnSpc>
-              <a:spcAft>
-                <a:spcPts val="300"/>
-              </a:spcAft>
-              <a:buNone/>
-            </a:pPr>
-            <a:r>
-              <a:rPr lang="en-US" sz="1200" i="1" dirty="0">
-                <a:solidFill>
-                  <a:srgbClr val="1A1A1A"/>
-                </a:solidFill>
-                <a:latin typeface="Georgia" pitchFamily="34" charset="0"/>
-                <a:ea typeface="Georgia" pitchFamily="34" charset="-122"/>
-                <a:cs typeface="Georgia" pitchFamily="34" charset="-120"/>
-              </a:rPr>
-              <a:t>Yoga Sūtras</a:t>
-            </a:r>
-            <a:endParaRPr lang="en-US" sz="1200" dirty="0"/>
-          </a:p>
-          <a:p>
-            <a:pPr algn="l" marL="342900" indent="-342900">
-              <a:lnSpc>
-                <a:spcPts val="1620"/>
-              </a:lnSpc>
-              <a:spcAft>
-                <a:spcPts val="300"/>
-              </a:spcAft>
-              <a:buSzPct val="100000"/>
-              <a:buChar char="•"/>
-            </a:pPr>
-            <a:r>
-              <a:rPr lang="en-US" sz="1200" b="1" dirty="0">
-                <a:solidFill>
-                  <a:srgbClr val="1A1A1A"/>
-                </a:solidFill>
-                <a:latin typeface="Georgia" pitchFamily="34" charset="0"/>
-                <a:ea typeface="Georgia" pitchFamily="34" charset="-122"/>
-                <a:cs typeface="Georgia" pitchFamily="34" charset="-120"/>
-              </a:rPr>
-              <a:t>5</a:t>
-            </a:r>
-            <a:pPr algn="l" indent="0" marL="0">
-              <a:lnSpc>
-                <a:spcPts val="1620"/>
-              </a:lnSpc>
-              <a:spcAft>
-                <a:spcPts val="300"/>
-              </a:spcAft>
-              <a:buNone/>
-            </a:pPr>
-            <a:r>
-              <a:rPr lang="en-US" sz="1200" dirty="0">
-                <a:solidFill>
-                  <a:srgbClr val="1A1A1A"/>
-                </a:solidFill>
-                <a:latin typeface="Georgia" pitchFamily="34" charset="0"/>
-                <a:ea typeface="Georgia" pitchFamily="34" charset="-122"/>
-                <a:cs typeface="Georgia" pitchFamily="34" charset="-120"/>
-              </a:rPr>
-              <a:t> — </a:t>
-            </a:r>
-            <a:pPr algn="l" indent="0" marL="0">
-              <a:lnSpc>
-                <a:spcPts val="1620"/>
-              </a:lnSpc>
-              <a:spcAft>
-                <a:spcPts val="300"/>
-              </a:spcAft>
-              <a:buNone/>
-            </a:pPr>
-            <a:r>
-              <a:rPr lang="en-US" sz="1200" i="1" dirty="0">
-                <a:solidFill>
-                  <a:srgbClr val="1A1A1A"/>
-                </a:solidFill>
-                <a:latin typeface="Georgia" pitchFamily="34" charset="0"/>
-                <a:ea typeface="Georgia" pitchFamily="34" charset="-122"/>
-                <a:cs typeface="Georgia" pitchFamily="34" charset="-120"/>
-              </a:rPr>
-              <a:t>Mīmāṁsā</a:t>
-            </a:r>
-            <a:pPr algn="l" indent="0" marL="0">
-              <a:lnSpc>
-                <a:spcPts val="1620"/>
-              </a:lnSpc>
-              <a:spcAft>
-                <a:spcPts val="300"/>
-              </a:spcAft>
-              <a:buNone/>
-            </a:pPr>
-            <a:r>
-              <a:rPr lang="en-US" sz="1200" dirty="0">
-                <a:solidFill>
-                  <a:srgbClr val="1A1A1A"/>
-                </a:solidFill>
-                <a:latin typeface="Georgia" pitchFamily="34" charset="0"/>
-                <a:ea typeface="Georgia" pitchFamily="34" charset="-122"/>
-                <a:cs typeface="Georgia" pitchFamily="34" charset="-120"/>
-              </a:rPr>
-              <a:t> (Pūrva) · Hermeneutics — how do we interpret the Veda? · Jaimini, </a:t>
-            </a:r>
-            <a:pPr algn="l" indent="0" marL="0">
-              <a:lnSpc>
-                <a:spcPts val="1620"/>
-              </a:lnSpc>
-              <a:spcAft>
-                <a:spcPts val="300"/>
-              </a:spcAft>
-              <a:buNone/>
-            </a:pPr>
-            <a:r>
-              <a:rPr lang="en-US" sz="1200" i="1" dirty="0">
-                <a:solidFill>
-                  <a:srgbClr val="1A1A1A"/>
-                </a:solidFill>
-                <a:latin typeface="Georgia" pitchFamily="34" charset="0"/>
-                <a:ea typeface="Georgia" pitchFamily="34" charset="-122"/>
-                <a:cs typeface="Georgia" pitchFamily="34" charset="-120"/>
-              </a:rPr>
-              <a:t>Mīmāṁsā Sūtras</a:t>
-            </a:r>
-            <a:endParaRPr lang="en-US" sz="1200" dirty="0"/>
-          </a:p>
-          <a:p>
-            <a:pPr algn="l" marL="342900" indent="-342900">
-              <a:lnSpc>
-                <a:spcPts val="1620"/>
-              </a:lnSpc>
-              <a:spcAft>
-                <a:spcPts val="300"/>
-              </a:spcAft>
-              <a:buSzPct val="100000"/>
-              <a:buChar char="•"/>
-            </a:pPr>
-            <a:r>
-              <a:rPr lang="en-US" sz="1200" b="1" dirty="0">
-                <a:solidFill>
-                  <a:srgbClr val="1A1A1A"/>
-                </a:solidFill>
-                <a:latin typeface="Georgia" pitchFamily="34" charset="0"/>
-                <a:ea typeface="Georgia" pitchFamily="34" charset="-122"/>
-                <a:cs typeface="Georgia" pitchFamily="34" charset="-120"/>
-              </a:rPr>
-              <a:t>6</a:t>
-            </a:r>
-            <a:pPr algn="l" indent="0" marL="0">
-              <a:lnSpc>
-                <a:spcPts val="1620"/>
-              </a:lnSpc>
-              <a:spcAft>
-                <a:spcPts val="300"/>
-              </a:spcAft>
-              <a:buNone/>
-            </a:pPr>
-            <a:r>
-              <a:rPr lang="en-US" sz="1200" dirty="0">
-                <a:solidFill>
-                  <a:srgbClr val="1A1A1A"/>
-                </a:solidFill>
-                <a:latin typeface="Georgia" pitchFamily="34" charset="0"/>
-                <a:ea typeface="Georgia" pitchFamily="34" charset="-122"/>
-                <a:cs typeface="Georgia" pitchFamily="34" charset="-120"/>
-              </a:rPr>
-              <a:t> — </a:t>
-            </a:r>
-            <a:pPr algn="l" indent="0" marL="0">
-              <a:lnSpc>
-                <a:spcPts val="1620"/>
-              </a:lnSpc>
-              <a:spcAft>
-                <a:spcPts val="300"/>
-              </a:spcAft>
-              <a:buNone/>
-            </a:pPr>
-            <a:r>
-              <a:rPr lang="en-US" sz="1200" i="1" dirty="0">
-                <a:solidFill>
-                  <a:srgbClr val="1A1A1A"/>
-                </a:solidFill>
-                <a:latin typeface="Georgia" pitchFamily="34" charset="0"/>
-                <a:ea typeface="Georgia" pitchFamily="34" charset="-122"/>
-                <a:cs typeface="Georgia" pitchFamily="34" charset="-120"/>
-              </a:rPr>
-              <a:t>Vedānta</a:t>
-            </a:r>
-            <a:pPr algn="l" indent="0" marL="0">
-              <a:lnSpc>
-                <a:spcPts val="1620"/>
-              </a:lnSpc>
-              <a:spcAft>
-                <a:spcPts val="300"/>
-              </a:spcAft>
-              <a:buNone/>
-            </a:pPr>
-            <a:r>
-              <a:rPr lang="en-US" sz="1200" dirty="0">
-                <a:solidFill>
-                  <a:srgbClr val="1A1A1A"/>
-                </a:solidFill>
-                <a:latin typeface="Georgia" pitchFamily="34" charset="0"/>
-                <a:ea typeface="Georgia" pitchFamily="34" charset="-122"/>
-                <a:cs typeface="Georgia" pitchFamily="34" charset="-120"/>
-              </a:rPr>
-              <a:t> (Uttara Mīmāṁsā) · Metaphysics — what is the ultimate? · Bādarāyaṇa, </a:t>
-            </a:r>
-            <a:pPr algn="l" indent="0" marL="0">
-              <a:lnSpc>
-                <a:spcPts val="1620"/>
-              </a:lnSpc>
-              <a:spcAft>
-                <a:spcPts val="300"/>
-              </a:spcAft>
-              <a:buNone/>
-            </a:pPr>
-            <a:r>
-              <a:rPr lang="en-US" sz="1200" i="1" dirty="0">
-                <a:solidFill>
-                  <a:srgbClr val="1A1A1A"/>
-                </a:solidFill>
-                <a:latin typeface="Georgia" pitchFamily="34" charset="0"/>
-                <a:ea typeface="Georgia" pitchFamily="34" charset="-122"/>
-                <a:cs typeface="Georgia" pitchFamily="34" charset="-120"/>
-              </a:rPr>
-              <a:t>Brahma Sūtras</a:t>
-            </a:r>
-            <a:pPr algn="l" indent="0" marL="0">
-              <a:lnSpc>
-                <a:spcPts val="1620"/>
-              </a:lnSpc>
-              <a:spcAft>
-                <a:spcPts val="300"/>
-              </a:spcAft>
-              <a:buNone/>
-            </a:pPr>
-            <a:r>
-              <a:rPr lang="en-US" sz="1200" dirty="0">
-                <a:solidFill>
-                  <a:srgbClr val="1A1A1A"/>
-                </a:solidFill>
-                <a:latin typeface="Georgia" pitchFamily="34" charset="0"/>
-                <a:ea typeface="Georgia" pitchFamily="34" charset="-122"/>
-                <a:cs typeface="Georgia" pitchFamily="34" charset="-120"/>
-              </a:rPr>
-              <a:t>; Śaṅkara, Rāmānuja, Madhva (later interpreters)</a:t>
-            </a:r>
-            <a:endParaRPr lang="en-US" sz="1200" dirty="0"/>
-          </a:p>
-        </p:txBody>
-      </p:sp>
-      <p:sp>
-        <p:nvSpPr>
-          <p:cNvPr id="7" name="Text 5"/>
-          <p:cNvSpPr/>
-          <p:nvPr/>
-        </p:nvSpPr>
-        <p:spPr>
-          <a:xfrm>
-            <a:off x="406301" y="3257848"/>
-            <a:ext cx="8498026" cy="639812"/>
-          </a:xfrm>
-          <a:prstGeom prst="rect">
-            <a:avLst/>
-          </a:prstGeom>
-          <a:noFill/>
-          <a:ln/>
-        </p:spPr>
-        <p:txBody>
-          <a:bodyPr wrap="square" lIns="0" tIns="0" rIns="0" bIns="0" rtlCol="0" anchor="t"/>
-          <a:lstStyle/>
-          <a:p>
-            <a:pPr algn="l" indent="0" marL="0">
-              <a:lnSpc>
-                <a:spcPts val="1680"/>
-              </a:lnSpc>
-              <a:spcBef>
-                <a:spcPts val="300"/>
-              </a:spcBef>
-              <a:spcAft>
-                <a:spcPts val="300"/>
-              </a:spcAft>
-              <a:buNone/>
-            </a:pPr>
-            <a:r>
-              <a:rPr lang="en-US" sz="1200" dirty="0">
-                <a:solidFill>
-                  <a:srgbClr val="1A1A1A"/>
-                </a:solidFill>
-                <a:latin typeface="Georgia" pitchFamily="34" charset="0"/>
-                <a:ea typeface="Georgia" pitchFamily="34" charset="-122"/>
-                <a:cs typeface="Georgia" pitchFamily="34" charset="-120"/>
-              </a:rPr>
-              <a:t>*</a:t>
-            </a:r>
-            <a:pPr algn="l" indent="0" marL="0">
-              <a:lnSpc>
-                <a:spcPts val="1680"/>
-              </a:lnSpc>
-              <a:spcBef>
-                <a:spcPts val="300"/>
-              </a:spcBef>
-              <a:spcAft>
-                <a:spcPts val="300"/>
-              </a:spcAft>
-              <a:buNone/>
-            </a:pPr>
-            <a:r>
-              <a:rPr lang="en-US" sz="1200" i="1" dirty="0">
-                <a:solidFill>
-                  <a:srgbClr val="1A1A1A"/>
-                </a:solidFill>
-                <a:latin typeface="Georgia" pitchFamily="34" charset="0"/>
-                <a:ea typeface="Georgia" pitchFamily="34" charset="-122"/>
-                <a:cs typeface="Georgia" pitchFamily="34" charset="-120"/>
-              </a:rPr>
-              <a:t>Note: these are often called the</a:t>
-            </a:r>
-            <a:pPr algn="l" indent="0" marL="0">
-              <a:lnSpc>
-                <a:spcPts val="1680"/>
-              </a:lnSpc>
-              <a:spcBef>
-                <a:spcPts val="300"/>
-              </a:spcBef>
-              <a:spcAft>
-                <a:spcPts val="300"/>
-              </a:spcAft>
-              <a:buNone/>
-            </a:pPr>
-            <a:r>
-              <a:rPr lang="en-US" sz="1200" dirty="0">
-                <a:solidFill>
-                  <a:srgbClr val="1A1A1A"/>
-                </a:solidFill>
-                <a:latin typeface="Georgia" pitchFamily="34" charset="0"/>
-                <a:ea typeface="Georgia" pitchFamily="34" charset="-122"/>
-                <a:cs typeface="Georgia" pitchFamily="34" charset="-120"/>
-              </a:rPr>
-              <a:t>āstika</a:t>
-            </a:r>
-            <a:pPr algn="l" indent="0" marL="0">
-              <a:lnSpc>
-                <a:spcPts val="1680"/>
-              </a:lnSpc>
-              <a:spcBef>
-                <a:spcPts val="300"/>
-              </a:spcBef>
-              <a:spcAft>
-                <a:spcPts val="300"/>
-              </a:spcAft>
-              <a:buNone/>
-            </a:pPr>
-            <a:r>
-              <a:rPr lang="en-US" sz="1200" i="1" dirty="0">
-                <a:solidFill>
-                  <a:srgbClr val="1A1A1A"/>
-                </a:solidFill>
-                <a:latin typeface="Georgia" pitchFamily="34" charset="0"/>
-                <a:ea typeface="Georgia" pitchFamily="34" charset="-122"/>
-                <a:cs typeface="Georgia" pitchFamily="34" charset="-120"/>
-              </a:rPr>
-              <a:t> schools</a:t>
-            </a:r>
-            <a:pPr algn="l" indent="0" marL="0">
-              <a:lnSpc>
-                <a:spcPts val="1680"/>
-              </a:lnSpc>
-              <a:spcBef>
-                <a:spcPts val="300"/>
-              </a:spcBef>
-              <a:spcAft>
-                <a:spcPts val="300"/>
-              </a:spcAft>
-              <a:buNone/>
-            </a:pPr>
-            <a:r>
-              <a:rPr lang="en-US" sz="1200" i="1" dirty="0">
-                <a:solidFill>
-                  <a:srgbClr val="1A1A1A"/>
-                </a:solidFill>
-                <a:latin typeface="Georgia" pitchFamily="34" charset="0"/>
-                <a:ea typeface="Georgia" pitchFamily="34" charset="-122"/>
-                <a:cs typeface="Georgia" pitchFamily="34" charset="-120"/>
-              </a:rPr>
-              <a:t> (those that accept Vedic authority). The</a:t>
-            </a:r>
-            <a:pPr algn="l" indent="0" marL="0">
-              <a:lnSpc>
-                <a:spcPts val="1680"/>
-              </a:lnSpc>
-              <a:spcBef>
-                <a:spcPts val="300"/>
-              </a:spcBef>
-              <a:spcAft>
-                <a:spcPts val="300"/>
-              </a:spcAft>
-              <a:buNone/>
-            </a:pPr>
-            <a:r>
-              <a:rPr lang="en-US" sz="1200" dirty="0">
-                <a:solidFill>
-                  <a:srgbClr val="1A1A1A"/>
-                </a:solidFill>
-                <a:latin typeface="Georgia" pitchFamily="34" charset="0"/>
-                <a:ea typeface="Georgia" pitchFamily="34" charset="-122"/>
-                <a:cs typeface="Georgia" pitchFamily="34" charset="-120"/>
-              </a:rPr>
-              <a:t>nāstika* schools (Buddhism, Jainism, Cārvāka) developed in parallel — different intellectual traditions also "Indian," not "IKS" by the conservative definition. Be explicit about this boundary choice.</a:t>
-            </a:r>
-            <a:endParaRPr lang="en-US" sz="1200" dirty="0"/>
-          </a:p>
-        </p:txBody>
-      </p:sp>
-      <p:sp>
-        <p:nvSpPr>
-          <p:cNvPr id="8" name="Text 6"/>
-          <p:cNvSpPr/>
-          <p:nvPr/>
-        </p:nvSpPr>
-        <p:spPr>
-          <a:xfrm>
-            <a:off x="406301" y="3973860"/>
-            <a:ext cx="8498026" cy="426541"/>
-          </a:xfrm>
-          <a:prstGeom prst="rect">
-            <a:avLst/>
-          </a:prstGeom>
-          <a:noFill/>
-          <a:ln/>
-        </p:spPr>
-        <p:txBody>
-          <a:bodyPr wrap="square" lIns="0" tIns="0" rIns="0" bIns="0" rtlCol="0" anchor="t"/>
-          <a:lstStyle/>
-          <a:p>
-            <a:pPr algn="l" indent="0" marL="0">
-              <a:lnSpc>
-                <a:spcPts val="1680"/>
-              </a:lnSpc>
-              <a:spcBef>
-                <a:spcPts val="300"/>
-              </a:spcBef>
-              <a:spcAft>
-                <a:spcPts val="300"/>
-              </a:spcAft>
-              <a:buNone/>
-            </a:pPr>
-            <a:r>
-              <a:rPr lang="en-US" sz="1200" b="1" dirty="0">
-                <a:solidFill>
-                  <a:srgbClr val="1A1A1A"/>
-                </a:solidFill>
-                <a:latin typeface="Georgia" pitchFamily="34" charset="0"/>
-                <a:ea typeface="Georgia" pitchFamily="34" charset="-122"/>
-                <a:cs typeface="Georgia" pitchFamily="34" charset="-120"/>
-              </a:rPr>
-              <a:t>Sāṅkhya and Yoga as a pair</a:t>
-            </a:r>
-            <a:pPr algn="l" indent="0" marL="0">
-              <a:lnSpc>
-                <a:spcPts val="1680"/>
-              </a:lnSpc>
-              <a:spcBef>
-                <a:spcPts val="300"/>
-              </a:spcBef>
-              <a:spcAft>
-                <a:spcPts val="300"/>
-              </a:spcAft>
-              <a:buNone/>
-            </a:pPr>
-            <a:r>
-              <a:rPr lang="en-US" sz="1200" dirty="0">
-                <a:solidFill>
-                  <a:srgbClr val="1A1A1A"/>
-                </a:solidFill>
-                <a:latin typeface="Georgia" pitchFamily="34" charset="0"/>
-                <a:ea typeface="Georgia" pitchFamily="34" charset="-122"/>
-                <a:cs typeface="Georgia" pitchFamily="34" charset="-120"/>
-              </a:rPr>
-              <a:t> — closely related; Sāṅkhya provides the metaphysics (25 tattvas — see Module 2 Senior), Yoga provides the practice. You met Sāṅkhya in Module 2 (Panchabhuta) and will meet Yoga in Module 8.</a:t>
-            </a:r>
-            <a:endParaRPr lang="en-US" sz="1200" dirty="0"/>
-          </a:p>
-        </p:txBody>
-      </p:sp>
-      <p:sp>
-        <p:nvSpPr>
-          <p:cNvPr id="9" name="Text 7"/>
-          <p:cNvSpPr/>
-          <p:nvPr/>
-        </p:nvSpPr>
-        <p:spPr>
-          <a:xfrm>
-            <a:off x="406301" y="4476601"/>
-            <a:ext cx="8498026" cy="639812"/>
-          </a:xfrm>
-          <a:prstGeom prst="rect">
-            <a:avLst/>
-          </a:prstGeom>
-          <a:noFill/>
-          <a:ln/>
-        </p:spPr>
-        <p:txBody>
-          <a:bodyPr wrap="square" lIns="0" tIns="0" rIns="0" bIns="0" rtlCol="0" anchor="t"/>
-          <a:lstStyle/>
-          <a:p>
-            <a:pPr algn="l" indent="0" marL="0">
-              <a:lnSpc>
-                <a:spcPts val="1680"/>
-              </a:lnSpc>
-              <a:spcBef>
-                <a:spcPts val="300"/>
-              </a:spcBef>
-              <a:spcAft>
-                <a:spcPts val="300"/>
-              </a:spcAft>
-              <a:buNone/>
-            </a:pPr>
-            <a:r>
-              <a:rPr lang="en-US" sz="1200" b="1" dirty="0">
-                <a:solidFill>
-                  <a:srgbClr val="1A1A1A"/>
-                </a:solidFill>
-                <a:latin typeface="Georgia" pitchFamily="34" charset="0"/>
-                <a:ea typeface="Georgia" pitchFamily="34" charset="-122"/>
-                <a:cs typeface="Georgia" pitchFamily="34" charset="-120"/>
-              </a:rPr>
-              <a:t>Nyāya's contribution to logic.</a:t>
-            </a:r>
-            <a:pPr algn="l" indent="0" marL="0">
-              <a:lnSpc>
-                <a:spcPts val="1680"/>
-              </a:lnSpc>
-              <a:spcBef>
-                <a:spcPts val="300"/>
-              </a:spcBef>
-              <a:spcAft>
-                <a:spcPts val="300"/>
-              </a:spcAft>
-              <a:buNone/>
-            </a:pPr>
-            <a:r>
-              <a:rPr lang="en-US" sz="1200" dirty="0">
-                <a:solidFill>
-                  <a:srgbClr val="1A1A1A"/>
-                </a:solidFill>
-                <a:latin typeface="Georgia" pitchFamily="34" charset="0"/>
-                <a:ea typeface="Georgia" pitchFamily="34" charset="-122"/>
-                <a:cs typeface="Georgia" pitchFamily="34" charset="-120"/>
-              </a:rPr>
-              <a:t> The Nyāya system developed sophisticated logical analysis — formal arguments (</a:t>
-            </a:r>
-            <a:pPr algn="l" indent="0" marL="0">
-              <a:lnSpc>
-                <a:spcPts val="1680"/>
-              </a:lnSpc>
-              <a:spcBef>
-                <a:spcPts val="300"/>
-              </a:spcBef>
-              <a:spcAft>
-                <a:spcPts val="300"/>
-              </a:spcAft>
-              <a:buNone/>
-            </a:pPr>
-            <a:r>
-              <a:rPr lang="en-US" sz="1200" i="1" dirty="0">
-                <a:solidFill>
-                  <a:srgbClr val="1A1A1A"/>
-                </a:solidFill>
-                <a:latin typeface="Georgia" pitchFamily="34" charset="0"/>
-                <a:ea typeface="Georgia" pitchFamily="34" charset="-122"/>
-                <a:cs typeface="Georgia" pitchFamily="34" charset="-120"/>
-              </a:rPr>
-              <a:t>anumāna</a:t>
-            </a:r>
-            <a:pPr algn="l" indent="0" marL="0">
-              <a:lnSpc>
-                <a:spcPts val="1680"/>
-              </a:lnSpc>
-              <a:spcBef>
-                <a:spcPts val="300"/>
-              </a:spcBef>
-              <a:spcAft>
-                <a:spcPts val="300"/>
-              </a:spcAft>
-              <a:buNone/>
-            </a:pPr>
-            <a:r>
-              <a:rPr lang="en-US" sz="1200" dirty="0">
-                <a:solidFill>
-                  <a:srgbClr val="1A1A1A"/>
-                </a:solidFill>
-                <a:latin typeface="Georgia" pitchFamily="34" charset="0"/>
-                <a:ea typeface="Georgia" pitchFamily="34" charset="-122"/>
-                <a:cs typeface="Georgia" pitchFamily="34" charset="-120"/>
-              </a:rPr>
-              <a:t>), categorical syllogisms, debate procedures (</a:t>
-            </a:r>
-            <a:pPr algn="l" indent="0" marL="0">
-              <a:lnSpc>
-                <a:spcPts val="1680"/>
-              </a:lnSpc>
-              <a:spcBef>
-                <a:spcPts val="300"/>
-              </a:spcBef>
-              <a:spcAft>
-                <a:spcPts val="300"/>
-              </a:spcAft>
-              <a:buNone/>
-            </a:pPr>
-            <a:r>
-              <a:rPr lang="en-US" sz="1200" i="1" dirty="0">
-                <a:solidFill>
-                  <a:srgbClr val="1A1A1A"/>
-                </a:solidFill>
-                <a:latin typeface="Georgia" pitchFamily="34" charset="0"/>
-                <a:ea typeface="Georgia" pitchFamily="34" charset="-122"/>
-                <a:cs typeface="Georgia" pitchFamily="34" charset="-120"/>
-              </a:rPr>
-              <a:t>tarka</a:t>
-            </a:r>
-            <a:pPr algn="l" indent="0" marL="0">
-              <a:lnSpc>
-                <a:spcPts val="1680"/>
-              </a:lnSpc>
-              <a:spcBef>
-                <a:spcPts val="300"/>
-              </a:spcBef>
-              <a:spcAft>
-                <a:spcPts val="300"/>
-              </a:spcAft>
-              <a:buNone/>
-            </a:pPr>
-            <a:r>
-              <a:rPr lang="en-US" sz="1200" dirty="0">
-                <a:solidFill>
-                  <a:srgbClr val="1A1A1A"/>
-                </a:solidFill>
-                <a:latin typeface="Georgia" pitchFamily="34" charset="0"/>
-                <a:ea typeface="Georgia" pitchFamily="34" charset="-122"/>
-                <a:cs typeface="Georgia" pitchFamily="34" charset="-120"/>
-              </a:rPr>
-              <a:t>). Influenced modern logic via early-20th-c. Indian logicians (especially Bimal Krishna Matilal's work in the 1960s).</a:t>
-            </a:r>
-            <a:endParaRPr lang="en-US" sz="1200" dirty="0"/>
-          </a:p>
-        </p:txBody>
-      </p:sp>
-      <p:sp>
-        <p:nvSpPr>
-          <p:cNvPr id="10" name="Text 8"/>
-          <p:cNvSpPr/>
-          <p:nvPr/>
-        </p:nvSpPr>
-        <p:spPr>
-          <a:xfrm>
-            <a:off x="406301" y="5268813"/>
+            <a:off x="406301" y="4434929"/>
             <a:ext cx="8498026" cy="213271"/>
           </a:xfrm>
           <a:prstGeom prst="rect">
@@ -4252,7 +4486,7 @@
                 <a:ea typeface="Times New Roman" pitchFamily="34" charset="-122"/>
                 <a:cs typeface="Times New Roman" pitchFamily="34" charset="-120"/>
               </a:rPr>
-              <a:t>Discussion (10 min)</a:t>
+              <a:t>Core (25 min)</a:t>
             </a:r>
             <a:endParaRPr lang="en-US" sz="1800" dirty="0"/>
           </a:p>
@@ -4267,7 +4501,7 @@
         <p:spPr>
           <a:xfrm>
             <a:off x="406301" y="870942"/>
-            <a:ext cx="8498026" cy="639812"/>
+            <a:ext cx="8498026" cy="213271"/>
           </a:xfrm>
           <a:prstGeom prst="rect">
             <a:avLst/>
@@ -4292,6 +4526,29 @@
               <a:buNone/>
             </a:pPr>
             <a:r>
+              <a:rPr lang="en-US" sz="1200" b="1" dirty="0">
+                <a:solidFill>
+                  <a:srgbClr val="1A1A1A"/>
+                </a:solidFill>
+                <a:latin typeface="Georgia" pitchFamily="34" charset="0"/>
+                <a:ea typeface="Georgia" pitchFamily="34" charset="-122"/>
+                <a:cs typeface="Georgia" pitchFamily="34" charset="-120"/>
+              </a:rPr>
+              <a:t>The Six Darśanas</a:t>
+            </a:r>
+            <a:pPr algn="l" indent="0" marL="0">
+              <a:lnSpc>
+                <a:spcPts val="1680"/>
+              </a:lnSpc>
+              <a:spcBef>
+                <a:spcPts val="300"/>
+              </a:spcBef>
+              <a:spcAft>
+                <a:spcPts val="300"/>
+              </a:spcAft>
+              <a:buNone/>
+            </a:pPr>
+            <a:r>
               <a:rPr lang="en-US" sz="1200" dirty="0">
                 <a:solidFill>
                   <a:srgbClr val="1A1A1A"/>
@@ -4300,7 +4557,7 @@
                 <a:ea typeface="Georgia" pitchFamily="34" charset="-122"/>
                 <a:cs typeface="Georgia" pitchFamily="34" charset="-120"/>
               </a:rPr>
-              <a:t>– Which darśana would address each question?   - "What does it mean to know something?" → Nyāya   - "Why does my mind keep wandering?" → Yoga   - "How should we read the Veda?" → Mīmāṁsā   - "What is the relationship between the individual self and ultimate reality?" → Vedānta   - "What are matter's smallest units?" → Vaiśeṣika</a:t>
+              <a:t> (classical philosophical systems, codified ~early CE):</a:t>
             </a:r>
             <a:endParaRPr lang="en-US" sz="1200" dirty="0"/>
           </a:p>
@@ -4309,6 +4566,54 @@
       <p:sp>
         <p:nvSpPr>
           <p:cNvPr id="5" name="Text 3"/>
+          <p:cNvSpPr/>
+          <p:nvPr/>
+        </p:nvSpPr>
+        <p:spPr>
+          <a:xfrm>
+            <a:off x="406301" y="1160413"/>
+            <a:ext cx="8498026" cy="213271"/>
+          </a:xfrm>
+          <a:prstGeom prst="rect">
+            <a:avLst/>
+          </a:prstGeom>
+          <a:noFill/>
+          <a:ln/>
+        </p:spPr>
+        <p:txBody>
+          <a:bodyPr wrap="square" lIns="0" tIns="0" rIns="0" bIns="0" rtlCol="0" anchor="t"/>
+          <a:lstStyle/>
+          <a:p>
+            <a:pPr algn="l" indent="0" marL="0">
+              <a:lnSpc>
+                <a:spcPts val="1680"/>
+              </a:lnSpc>
+              <a:spcBef>
+                <a:spcPts val="300"/>
+              </a:spcBef>
+              <a:spcAft>
+                <a:spcPts val="300"/>
+              </a:spcAft>
+              <a:buNone/>
+            </a:pPr>
+            <a:r>
+              <a:rPr lang="en-US" sz="1200" i="1" dirty="0">
+                <a:solidFill>
+                  <a:srgbClr val="1A1A1A"/>
+                </a:solidFill>
+                <a:latin typeface="Georgia" pitchFamily="34" charset="0"/>
+                <a:ea typeface="Georgia" pitchFamily="34" charset="-122"/>
+                <a:cs typeface="Georgia" pitchFamily="34" charset="-120"/>
+              </a:rPr>
+              <a:t>Each row: # · Sanskrit · Central question · Founder/text.</a:t>
+            </a:r>
+            <a:endParaRPr lang="en-US" sz="1200" dirty="0"/>
+          </a:p>
+        </p:txBody>
+      </p:sp>
+      <p:sp>
+        <p:nvSpPr>
+          <p:cNvPr id="6" name="Text 4"/>
           <p:cNvSpPr/>
           <p:nvPr/>
         </p:nvSpPr>
@@ -4458,7 +4763,7 @@
                 <a:ea typeface="Times New Roman" pitchFamily="34" charset="-122"/>
                 <a:cs typeface="Times New Roman" pitchFamily="34" charset="-120"/>
               </a:rPr>
-              <a:t>Wrap-up (5 min)</a:t>
+              <a:t>Core (25 min) (cont.)</a:t>
             </a:r>
             <a:endParaRPr lang="en-US" sz="1800" dirty="0"/>
           </a:p>
@@ -4472,8 +4777,8 @@
         </p:nvSpPr>
         <p:spPr>
           <a:xfrm>
-            <a:off x="406301" y="870942"/>
-            <a:ext cx="8498026" cy="213271"/>
+            <a:off x="634901" y="883593"/>
+            <a:ext cx="8102798" cy="1257002"/>
           </a:xfrm>
           <a:prstGeom prst="rect">
             <a:avLst/>
@@ -4485,13 +4790,31 @@
           <a:bodyPr wrap="square" lIns="0" tIns="0" rIns="0" bIns="0" rtlCol="0" anchor="t"/>
           <a:lstStyle/>
           <a:p>
-            <a:pPr algn="l" indent="0" marL="0">
-              <a:lnSpc>
-                <a:spcPts val="1680"/>
-              </a:lnSpc>
-              <a:spcBef>
-                <a:spcPts val="300"/>
-              </a:spcBef>
+            <a:pPr algn="l" marL="342900" indent="-342900">
+              <a:lnSpc>
+                <a:spcPts val="1620"/>
+              </a:lnSpc>
+              <a:spcAft>
+                <a:spcPts val="300"/>
+              </a:spcAft>
+              <a:buSzPct val="100000"/>
+              <a:buChar char="•"/>
+            </a:pPr>
+            <a:r>
+              <a:rPr lang="en-US" sz="1200" b="1" dirty="0">
+                <a:solidFill>
+                  <a:srgbClr val="1A1A1A"/>
+                </a:solidFill>
+                <a:latin typeface="Georgia" pitchFamily="34" charset="0"/>
+                <a:ea typeface="Georgia" pitchFamily="34" charset="-122"/>
+                <a:cs typeface="Georgia" pitchFamily="34" charset="-120"/>
+              </a:rPr>
+              <a:t>1</a:t>
+            </a:r>
+            <a:pPr algn="l" indent="0" marL="0">
+              <a:lnSpc>
+                <a:spcPts val="1620"/>
+              </a:lnSpc>
               <a:spcAft>
                 <a:spcPts val="300"/>
               </a:spcAft>
@@ -4506,15 +4829,12 @@
                 <a:ea typeface="Georgia" pitchFamily="34" charset="-122"/>
                 <a:cs typeface="Georgia" pitchFamily="34" charset="-120"/>
               </a:rPr>
-              <a:t>– Preview Day 4: </a:t>
-            </a:r>
-            <a:pPr algn="l" indent="0" marL="0">
-              <a:lnSpc>
-                <a:spcPts val="1680"/>
-              </a:lnSpc>
-              <a:spcBef>
-                <a:spcPts val="300"/>
-              </a:spcBef>
+              <a:t> — </a:t>
+            </a:r>
+            <a:pPr algn="l" indent="0" marL="0">
+              <a:lnSpc>
+                <a:spcPts val="1620"/>
+              </a:lnSpc>
               <a:spcAft>
                 <a:spcPts val="300"/>
               </a:spcAft>
@@ -4529,7 +4849,483 @@
                 <a:ea typeface="Georgia" pitchFamily="34" charset="-122"/>
                 <a:cs typeface="Georgia" pitchFamily="34" charset="-120"/>
               </a:rPr>
-              <a:t>"Tomorrow — Indian mathematics in specifics. Bakhshali, Bhāskara, Mādhava."</a:t>
+              <a:t>Nyāya</a:t>
+            </a:r>
+            <a:pPr algn="l" indent="0" marL="0">
+              <a:lnSpc>
+                <a:spcPts val="1620"/>
+              </a:lnSpc>
+              <a:spcAft>
+                <a:spcPts val="300"/>
+              </a:spcAft>
+              <a:buNone/>
+            </a:pPr>
+            <a:r>
+              <a:rPr lang="en-US" sz="1200" dirty="0">
+                <a:solidFill>
+                  <a:srgbClr val="1A1A1A"/>
+                </a:solidFill>
+                <a:latin typeface="Georgia" pitchFamily="34" charset="0"/>
+                <a:ea typeface="Georgia" pitchFamily="34" charset="-122"/>
+                <a:cs typeface="Georgia" pitchFamily="34" charset="-120"/>
+              </a:rPr>
+              <a:t> · Logic &amp; epistemology — what counts as valid knowledge? · Gautama, </a:t>
+            </a:r>
+            <a:pPr algn="l" indent="0" marL="0">
+              <a:lnSpc>
+                <a:spcPts val="1620"/>
+              </a:lnSpc>
+              <a:spcAft>
+                <a:spcPts val="300"/>
+              </a:spcAft>
+              <a:buNone/>
+            </a:pPr>
+            <a:r>
+              <a:rPr lang="en-US" sz="1200" i="1" dirty="0">
+                <a:solidFill>
+                  <a:srgbClr val="1A1A1A"/>
+                </a:solidFill>
+                <a:latin typeface="Georgia" pitchFamily="34" charset="0"/>
+                <a:ea typeface="Georgia" pitchFamily="34" charset="-122"/>
+                <a:cs typeface="Georgia" pitchFamily="34" charset="-120"/>
+              </a:rPr>
+              <a:t>Nyāya Sūtras</a:t>
+            </a:r>
+            <a:endParaRPr lang="en-US" sz="1200" dirty="0"/>
+          </a:p>
+          <a:p>
+            <a:pPr algn="l" marL="342900" indent="-342900">
+              <a:lnSpc>
+                <a:spcPts val="1620"/>
+              </a:lnSpc>
+              <a:spcAft>
+                <a:spcPts val="300"/>
+              </a:spcAft>
+              <a:buSzPct val="100000"/>
+              <a:buChar char="•"/>
+            </a:pPr>
+            <a:r>
+              <a:rPr lang="en-US" sz="1200" b="1" dirty="0">
+                <a:solidFill>
+                  <a:srgbClr val="1A1A1A"/>
+                </a:solidFill>
+                <a:latin typeface="Georgia" pitchFamily="34" charset="0"/>
+                <a:ea typeface="Georgia" pitchFamily="34" charset="-122"/>
+                <a:cs typeface="Georgia" pitchFamily="34" charset="-120"/>
+              </a:rPr>
+              <a:t>2</a:t>
+            </a:r>
+            <a:pPr algn="l" indent="0" marL="0">
+              <a:lnSpc>
+                <a:spcPts val="1620"/>
+              </a:lnSpc>
+              <a:spcAft>
+                <a:spcPts val="300"/>
+              </a:spcAft>
+              <a:buNone/>
+            </a:pPr>
+            <a:r>
+              <a:rPr lang="en-US" sz="1200" dirty="0">
+                <a:solidFill>
+                  <a:srgbClr val="1A1A1A"/>
+                </a:solidFill>
+                <a:latin typeface="Georgia" pitchFamily="34" charset="0"/>
+                <a:ea typeface="Georgia" pitchFamily="34" charset="-122"/>
+                <a:cs typeface="Georgia" pitchFamily="34" charset="-120"/>
+              </a:rPr>
+              <a:t> — </a:t>
+            </a:r>
+            <a:pPr algn="l" indent="0" marL="0">
+              <a:lnSpc>
+                <a:spcPts val="1620"/>
+              </a:lnSpc>
+              <a:spcAft>
+                <a:spcPts val="300"/>
+              </a:spcAft>
+              <a:buNone/>
+            </a:pPr>
+            <a:r>
+              <a:rPr lang="en-US" sz="1200" i="1" dirty="0">
+                <a:solidFill>
+                  <a:srgbClr val="1A1A1A"/>
+                </a:solidFill>
+                <a:latin typeface="Georgia" pitchFamily="34" charset="0"/>
+                <a:ea typeface="Georgia" pitchFamily="34" charset="-122"/>
+                <a:cs typeface="Georgia" pitchFamily="34" charset="-120"/>
+              </a:rPr>
+              <a:t>Vaiśeṣika</a:t>
+            </a:r>
+            <a:pPr algn="l" indent="0" marL="0">
+              <a:lnSpc>
+                <a:spcPts val="1620"/>
+              </a:lnSpc>
+              <a:spcAft>
+                <a:spcPts val="300"/>
+              </a:spcAft>
+              <a:buNone/>
+            </a:pPr>
+            <a:r>
+              <a:rPr lang="en-US" sz="1200" dirty="0">
+                <a:solidFill>
+                  <a:srgbClr val="1A1A1A"/>
+                </a:solidFill>
+                <a:latin typeface="Georgia" pitchFamily="34" charset="0"/>
+                <a:ea typeface="Georgia" pitchFamily="34" charset="-122"/>
+                <a:cs typeface="Georgia" pitchFamily="34" charset="-120"/>
+              </a:rPr>
+              <a:t> · Atomism &amp; metaphysics — what categories of being exist? · Kaṇāda, </a:t>
+            </a:r>
+            <a:pPr algn="l" indent="0" marL="0">
+              <a:lnSpc>
+                <a:spcPts val="1620"/>
+              </a:lnSpc>
+              <a:spcAft>
+                <a:spcPts val="300"/>
+              </a:spcAft>
+              <a:buNone/>
+            </a:pPr>
+            <a:r>
+              <a:rPr lang="en-US" sz="1200" i="1" dirty="0">
+                <a:solidFill>
+                  <a:srgbClr val="1A1A1A"/>
+                </a:solidFill>
+                <a:latin typeface="Georgia" pitchFamily="34" charset="0"/>
+                <a:ea typeface="Georgia" pitchFamily="34" charset="-122"/>
+                <a:cs typeface="Georgia" pitchFamily="34" charset="-120"/>
+              </a:rPr>
+              <a:t>Vaiśeṣika Sūtras</a:t>
+            </a:r>
+            <a:endParaRPr lang="en-US" sz="1200" dirty="0"/>
+          </a:p>
+          <a:p>
+            <a:pPr algn="l" marL="342900" indent="-342900">
+              <a:lnSpc>
+                <a:spcPts val="1620"/>
+              </a:lnSpc>
+              <a:spcAft>
+                <a:spcPts val="300"/>
+              </a:spcAft>
+              <a:buSzPct val="100000"/>
+              <a:buChar char="•"/>
+            </a:pPr>
+            <a:r>
+              <a:rPr lang="en-US" sz="1200" b="1" dirty="0">
+                <a:solidFill>
+                  <a:srgbClr val="1A1A1A"/>
+                </a:solidFill>
+                <a:latin typeface="Georgia" pitchFamily="34" charset="0"/>
+                <a:ea typeface="Georgia" pitchFamily="34" charset="-122"/>
+                <a:cs typeface="Georgia" pitchFamily="34" charset="-120"/>
+              </a:rPr>
+              <a:t>3</a:t>
+            </a:r>
+            <a:pPr algn="l" indent="0" marL="0">
+              <a:lnSpc>
+                <a:spcPts val="1620"/>
+              </a:lnSpc>
+              <a:spcAft>
+                <a:spcPts val="300"/>
+              </a:spcAft>
+              <a:buNone/>
+            </a:pPr>
+            <a:r>
+              <a:rPr lang="en-US" sz="1200" dirty="0">
+                <a:solidFill>
+                  <a:srgbClr val="1A1A1A"/>
+                </a:solidFill>
+                <a:latin typeface="Georgia" pitchFamily="34" charset="0"/>
+                <a:ea typeface="Georgia" pitchFamily="34" charset="-122"/>
+                <a:cs typeface="Georgia" pitchFamily="34" charset="-120"/>
+              </a:rPr>
+              <a:t> — </a:t>
+            </a:r>
+            <a:pPr algn="l" indent="0" marL="0">
+              <a:lnSpc>
+                <a:spcPts val="1620"/>
+              </a:lnSpc>
+              <a:spcAft>
+                <a:spcPts val="300"/>
+              </a:spcAft>
+              <a:buNone/>
+            </a:pPr>
+            <a:r>
+              <a:rPr lang="en-US" sz="1200" i="1" dirty="0">
+                <a:solidFill>
+                  <a:srgbClr val="1A1A1A"/>
+                </a:solidFill>
+                <a:latin typeface="Georgia" pitchFamily="34" charset="0"/>
+                <a:ea typeface="Georgia" pitchFamily="34" charset="-122"/>
+                <a:cs typeface="Georgia" pitchFamily="34" charset="-120"/>
+              </a:rPr>
+              <a:t>Sāṅkhya</a:t>
+            </a:r>
+            <a:pPr algn="l" indent="0" marL="0">
+              <a:lnSpc>
+                <a:spcPts val="1620"/>
+              </a:lnSpc>
+              <a:spcAft>
+                <a:spcPts val="300"/>
+              </a:spcAft>
+              <a:buNone/>
+            </a:pPr>
+            <a:r>
+              <a:rPr lang="en-US" sz="1200" dirty="0">
+                <a:solidFill>
+                  <a:srgbClr val="1A1A1A"/>
+                </a:solidFill>
+                <a:latin typeface="Georgia" pitchFamily="34" charset="0"/>
+                <a:ea typeface="Georgia" pitchFamily="34" charset="-122"/>
+                <a:cs typeface="Georgia" pitchFamily="34" charset="-120"/>
+              </a:rPr>
+              <a:t> · Cosmology — what are the constituents of reality? · Kapila / Īśvarakṛṣṇa, </a:t>
+            </a:r>
+            <a:pPr algn="l" indent="0" marL="0">
+              <a:lnSpc>
+                <a:spcPts val="1620"/>
+              </a:lnSpc>
+              <a:spcAft>
+                <a:spcPts val="300"/>
+              </a:spcAft>
+              <a:buNone/>
+            </a:pPr>
+            <a:r>
+              <a:rPr lang="en-US" sz="1200" i="1" dirty="0">
+                <a:solidFill>
+                  <a:srgbClr val="1A1A1A"/>
+                </a:solidFill>
+                <a:latin typeface="Georgia" pitchFamily="34" charset="0"/>
+                <a:ea typeface="Georgia" pitchFamily="34" charset="-122"/>
+                <a:cs typeface="Georgia" pitchFamily="34" charset="-120"/>
+              </a:rPr>
+              <a:t>Sāṅkhya Kārikā</a:t>
+            </a:r>
+            <a:pPr algn="l" indent="0" marL="0">
+              <a:lnSpc>
+                <a:spcPts val="1620"/>
+              </a:lnSpc>
+              <a:spcAft>
+                <a:spcPts val="300"/>
+              </a:spcAft>
+              <a:buNone/>
+            </a:pPr>
+            <a:r>
+              <a:rPr lang="en-US" sz="1200" dirty="0">
+                <a:solidFill>
+                  <a:srgbClr val="1A1A1A"/>
+                </a:solidFill>
+                <a:latin typeface="Georgia" pitchFamily="34" charset="0"/>
+                <a:ea typeface="Georgia" pitchFamily="34" charset="-122"/>
+                <a:cs typeface="Georgia" pitchFamily="34" charset="-120"/>
+              </a:rPr>
+              <a:t> (4th c. CE)</a:t>
+            </a:r>
+            <a:endParaRPr lang="en-US" sz="1200" dirty="0"/>
+          </a:p>
+          <a:p>
+            <a:pPr algn="l" marL="342900" indent="-342900">
+              <a:lnSpc>
+                <a:spcPts val="1620"/>
+              </a:lnSpc>
+              <a:spcAft>
+                <a:spcPts val="300"/>
+              </a:spcAft>
+              <a:buSzPct val="100000"/>
+              <a:buChar char="•"/>
+            </a:pPr>
+            <a:r>
+              <a:rPr lang="en-US" sz="1200" b="1" dirty="0">
+                <a:solidFill>
+                  <a:srgbClr val="1A1A1A"/>
+                </a:solidFill>
+                <a:latin typeface="Georgia" pitchFamily="34" charset="0"/>
+                <a:ea typeface="Georgia" pitchFamily="34" charset="-122"/>
+                <a:cs typeface="Georgia" pitchFamily="34" charset="-120"/>
+              </a:rPr>
+              <a:t>4</a:t>
+            </a:r>
+            <a:pPr algn="l" indent="0" marL="0">
+              <a:lnSpc>
+                <a:spcPts val="1620"/>
+              </a:lnSpc>
+              <a:spcAft>
+                <a:spcPts val="300"/>
+              </a:spcAft>
+              <a:buNone/>
+            </a:pPr>
+            <a:r>
+              <a:rPr lang="en-US" sz="1200" dirty="0">
+                <a:solidFill>
+                  <a:srgbClr val="1A1A1A"/>
+                </a:solidFill>
+                <a:latin typeface="Georgia" pitchFamily="34" charset="0"/>
+                <a:ea typeface="Georgia" pitchFamily="34" charset="-122"/>
+                <a:cs typeface="Georgia" pitchFamily="34" charset="-120"/>
+              </a:rPr>
+              <a:t> — </a:t>
+            </a:r>
+            <a:pPr algn="l" indent="0" marL="0">
+              <a:lnSpc>
+                <a:spcPts val="1620"/>
+              </a:lnSpc>
+              <a:spcAft>
+                <a:spcPts val="300"/>
+              </a:spcAft>
+              <a:buNone/>
+            </a:pPr>
+            <a:r>
+              <a:rPr lang="en-US" sz="1200" i="1" dirty="0">
+                <a:solidFill>
+                  <a:srgbClr val="1A1A1A"/>
+                </a:solidFill>
+                <a:latin typeface="Georgia" pitchFamily="34" charset="0"/>
+                <a:ea typeface="Georgia" pitchFamily="34" charset="-122"/>
+                <a:cs typeface="Georgia" pitchFamily="34" charset="-120"/>
+              </a:rPr>
+              <a:t>Yoga</a:t>
+            </a:r>
+            <a:pPr algn="l" indent="0" marL="0">
+              <a:lnSpc>
+                <a:spcPts val="1620"/>
+              </a:lnSpc>
+              <a:spcAft>
+                <a:spcPts val="300"/>
+              </a:spcAft>
+              <a:buNone/>
+            </a:pPr>
+            <a:r>
+              <a:rPr lang="en-US" sz="1200" dirty="0">
+                <a:solidFill>
+                  <a:srgbClr val="1A1A1A"/>
+                </a:solidFill>
+                <a:latin typeface="Georgia" pitchFamily="34" charset="0"/>
+                <a:ea typeface="Georgia" pitchFamily="34" charset="-122"/>
+                <a:cs typeface="Georgia" pitchFamily="34" charset="-120"/>
+              </a:rPr>
+              <a:t> · Practice — how does one settle the mind? · Patañjali, </a:t>
+            </a:r>
+            <a:pPr algn="l" indent="0" marL="0">
+              <a:lnSpc>
+                <a:spcPts val="1620"/>
+              </a:lnSpc>
+              <a:spcAft>
+                <a:spcPts val="300"/>
+              </a:spcAft>
+              <a:buNone/>
+            </a:pPr>
+            <a:r>
+              <a:rPr lang="en-US" sz="1200" i="1" dirty="0">
+                <a:solidFill>
+                  <a:srgbClr val="1A1A1A"/>
+                </a:solidFill>
+                <a:latin typeface="Georgia" pitchFamily="34" charset="0"/>
+                <a:ea typeface="Georgia" pitchFamily="34" charset="-122"/>
+                <a:cs typeface="Georgia" pitchFamily="34" charset="-120"/>
+              </a:rPr>
+              <a:t>Yoga Sūtras</a:t>
+            </a:r>
+            <a:endParaRPr lang="en-US" sz="1200" dirty="0"/>
+          </a:p>
+          <a:p>
+            <a:pPr algn="l" marL="342900" indent="-342900">
+              <a:lnSpc>
+                <a:spcPts val="1620"/>
+              </a:lnSpc>
+              <a:spcAft>
+                <a:spcPts val="300"/>
+              </a:spcAft>
+              <a:buSzPct val="100000"/>
+              <a:buChar char="•"/>
+            </a:pPr>
+            <a:r>
+              <a:rPr lang="en-US" sz="1200" b="1" dirty="0">
+                <a:solidFill>
+                  <a:srgbClr val="1A1A1A"/>
+                </a:solidFill>
+                <a:latin typeface="Georgia" pitchFamily="34" charset="0"/>
+                <a:ea typeface="Georgia" pitchFamily="34" charset="-122"/>
+                <a:cs typeface="Georgia" pitchFamily="34" charset="-120"/>
+              </a:rPr>
+              <a:t>5</a:t>
+            </a:r>
+            <a:pPr algn="l" indent="0" marL="0">
+              <a:lnSpc>
+                <a:spcPts val="1620"/>
+              </a:lnSpc>
+              <a:spcAft>
+                <a:spcPts val="300"/>
+              </a:spcAft>
+              <a:buNone/>
+            </a:pPr>
+            <a:r>
+              <a:rPr lang="en-US" sz="1200" dirty="0">
+                <a:solidFill>
+                  <a:srgbClr val="1A1A1A"/>
+                </a:solidFill>
+                <a:latin typeface="Georgia" pitchFamily="34" charset="0"/>
+                <a:ea typeface="Georgia" pitchFamily="34" charset="-122"/>
+                <a:cs typeface="Georgia" pitchFamily="34" charset="-120"/>
+              </a:rPr>
+              <a:t> — </a:t>
+            </a:r>
+            <a:pPr algn="l" indent="0" marL="0">
+              <a:lnSpc>
+                <a:spcPts val="1620"/>
+              </a:lnSpc>
+              <a:spcAft>
+                <a:spcPts val="300"/>
+              </a:spcAft>
+              <a:buNone/>
+            </a:pPr>
+            <a:r>
+              <a:rPr lang="en-US" sz="1200" i="1" dirty="0">
+                <a:solidFill>
+                  <a:srgbClr val="1A1A1A"/>
+                </a:solidFill>
+                <a:latin typeface="Georgia" pitchFamily="34" charset="0"/>
+                <a:ea typeface="Georgia" pitchFamily="34" charset="-122"/>
+                <a:cs typeface="Georgia" pitchFamily="34" charset="-120"/>
+              </a:rPr>
+              <a:t>Mīmāṁsā</a:t>
+            </a:r>
+            <a:pPr algn="l" indent="0" marL="0">
+              <a:lnSpc>
+                <a:spcPts val="1620"/>
+              </a:lnSpc>
+              <a:spcAft>
+                <a:spcPts val="300"/>
+              </a:spcAft>
+              <a:buNone/>
+            </a:pPr>
+            <a:r>
+              <a:rPr lang="en-US" sz="1200" dirty="0">
+                <a:solidFill>
+                  <a:srgbClr val="1A1A1A"/>
+                </a:solidFill>
+                <a:latin typeface="Georgia" pitchFamily="34" charset="0"/>
+                <a:ea typeface="Georgia" pitchFamily="34" charset="-122"/>
+                <a:cs typeface="Georgia" pitchFamily="34" charset="-120"/>
+              </a:rPr>
+              <a:t> (Pūrva) · Hermeneutics — how do we interpret the Veda? · Jaimini, </a:t>
+            </a:r>
+            <a:pPr algn="l" indent="0" marL="0">
+              <a:lnSpc>
+                <a:spcPts val="1620"/>
+              </a:lnSpc>
+              <a:spcAft>
+                <a:spcPts val="300"/>
+              </a:spcAft>
+              <a:buNone/>
+            </a:pPr>
+            <a:r>
+              <a:rPr lang="en-US" sz="1200" i="1" dirty="0">
+                <a:solidFill>
+                  <a:srgbClr val="1A1A1A"/>
+                </a:solidFill>
+                <a:latin typeface="Georgia" pitchFamily="34" charset="0"/>
+                <a:ea typeface="Georgia" pitchFamily="34" charset="-122"/>
+                <a:cs typeface="Georgia" pitchFamily="34" charset="-120"/>
+              </a:rPr>
+              <a:t>Mīmāṁsā Sūtras</a:t>
             </a:r>
             <a:endParaRPr lang="en-US" sz="1200" dirty="0"/>
           </a:p>
@@ -4687,7 +5483,7 @@
                 <a:ea typeface="Times New Roman" pitchFamily="34" charset="-122"/>
                 <a:cs typeface="Times New Roman" pitchFamily="34" charset="-120"/>
               </a:rPr>
-              <a:t>Differentiation</a:t>
+              <a:t>Core (25 min) (cont.)</a:t>
             </a:r>
             <a:endParaRPr lang="en-US" sz="1800" dirty="0"/>
           </a:p>
@@ -4702,7 +5498,7 @@
         <p:spPr>
           <a:xfrm>
             <a:off x="634901" y="883593"/>
-            <a:ext cx="8102798" cy="525661"/>
+            <a:ext cx="8102798" cy="487561"/>
           </a:xfrm>
           <a:prstGeom prst="rect">
             <a:avLst/>
@@ -4733,7 +5529,7 @@
                 <a:ea typeface="Georgia" pitchFamily="34" charset="-122"/>
                 <a:cs typeface="Georgia" pitchFamily="34" charset="-120"/>
               </a:rPr>
-              <a:t>Tier up:</a:t>
+              <a:t>6</a:t>
             </a:r>
             <a:pPr algn="l" indent="0" marL="0">
               <a:lnSpc>
@@ -4753,7 +5549,7 @@
                 <a:ea typeface="Georgia" pitchFamily="34" charset="-122"/>
                 <a:cs typeface="Georgia" pitchFamily="34" charset="-120"/>
               </a:rPr>
-              <a:t> Read Matilal, B. K. (1986). </a:t>
+              <a:t> — </a:t>
             </a:r>
             <a:pPr algn="l" indent="0" marL="0">
               <a:lnSpc>
@@ -4773,7 +5569,7 @@
                 <a:ea typeface="Georgia" pitchFamily="34" charset="-122"/>
                 <a:cs typeface="Georgia" pitchFamily="34" charset="-120"/>
               </a:rPr>
-              <a:t>Perception: An Essay on Classical Indian Theories of Knowledge</a:t>
+              <a:t>Vedānta</a:t>
             </a:r>
             <a:pPr algn="l" indent="0" marL="0">
               <a:lnSpc>
@@ -4793,36 +5589,80 @@
                 <a:ea typeface="Georgia" pitchFamily="34" charset="-122"/>
                 <a:cs typeface="Georgia" pitchFamily="34" charset="-120"/>
               </a:rPr>
-              <a:t>. Oxford.</a:t>
+              <a:t> (Uttara Mīmāṁsā) · Metaphysics — what is the ultimate? · Bādarāyaṇa, </a:t>
+            </a:r>
+            <a:pPr algn="l" indent="0" marL="0">
+              <a:lnSpc>
+                <a:spcPts val="1620"/>
+              </a:lnSpc>
+              <a:spcAft>
+                <a:spcPts val="300"/>
+              </a:spcAft>
+              <a:buNone/>
+            </a:pPr>
+            <a:r>
+              <a:rPr lang="en-US" sz="1200" i="1" dirty="0">
+                <a:solidFill>
+                  <a:srgbClr val="1A1A1A"/>
+                </a:solidFill>
+                <a:latin typeface="Georgia" pitchFamily="34" charset="0"/>
+                <a:ea typeface="Georgia" pitchFamily="34" charset="-122"/>
+                <a:cs typeface="Georgia" pitchFamily="34" charset="-120"/>
+              </a:rPr>
+              <a:t>Brahma Sūtras</a:t>
+            </a:r>
+            <a:pPr algn="l" indent="0" marL="0">
+              <a:lnSpc>
+                <a:spcPts val="1620"/>
+              </a:lnSpc>
+              <a:spcAft>
+                <a:spcPts val="300"/>
+              </a:spcAft>
+              <a:buNone/>
+            </a:pPr>
+            <a:r>
+              <a:rPr lang="en-US" sz="1200" dirty="0">
+                <a:solidFill>
+                  <a:srgbClr val="1A1A1A"/>
+                </a:solidFill>
+                <a:latin typeface="Georgia" pitchFamily="34" charset="0"/>
+                <a:ea typeface="Georgia" pitchFamily="34" charset="-122"/>
+                <a:cs typeface="Georgia" pitchFamily="34" charset="-120"/>
+              </a:rPr>
+              <a:t>; Śaṅkara, Rāmānuja, Madhva (later interpreters)</a:t>
             </a:r>
             <a:endParaRPr lang="en-US" sz="1200" dirty="0"/>
           </a:p>
-          <a:p>
-            <a:pPr algn="l" marL="342900" indent="-342900">
-              <a:lnSpc>
-                <a:spcPts val="1620"/>
-              </a:lnSpc>
-              <a:spcAft>
-                <a:spcPts val="300"/>
-              </a:spcAft>
-              <a:buSzPct val="100000"/>
-              <a:buChar char="•"/>
-            </a:pPr>
-            <a:r>
-              <a:rPr lang="en-US" sz="1200" b="1" dirty="0">
-                <a:solidFill>
-                  <a:srgbClr val="1A1A1A"/>
-                </a:solidFill>
-                <a:latin typeface="Georgia" pitchFamily="34" charset="0"/>
-                <a:ea typeface="Georgia" pitchFamily="34" charset="-122"/>
-                <a:cs typeface="Georgia" pitchFamily="34" charset="-120"/>
-              </a:rPr>
-              <a:t>Tier down:</a:t>
-            </a:r>
-            <a:pPr algn="l" indent="0" marL="0">
-              <a:lnSpc>
-                <a:spcPts val="1620"/>
-              </a:lnSpc>
+        </p:txBody>
+      </p:sp>
+      <p:sp>
+        <p:nvSpPr>
+          <p:cNvPr id="5" name="Text 3"/>
+          <p:cNvSpPr/>
+          <p:nvPr/>
+        </p:nvSpPr>
+        <p:spPr>
+          <a:xfrm>
+            <a:off x="406301" y="1460004"/>
+            <a:ext cx="8498026" cy="639812"/>
+          </a:xfrm>
+          <a:prstGeom prst="rect">
+            <a:avLst/>
+          </a:prstGeom>
+          <a:noFill/>
+          <a:ln/>
+        </p:spPr>
+        <p:txBody>
+          <a:bodyPr wrap="square" lIns="0" tIns="0" rIns="0" bIns="0" rtlCol="0" anchor="t"/>
+          <a:lstStyle/>
+          <a:p>
+            <a:pPr algn="l" indent="0" marL="0">
+              <a:lnSpc>
+                <a:spcPts val="1680"/>
+              </a:lnSpc>
+              <a:spcBef>
+                <a:spcPts val="300"/>
+              </a:spcBef>
               <a:spcAft>
                 <a:spcPts val="300"/>
               </a:spcAft>
@@ -4837,7 +5677,122 @@
                 <a:ea typeface="Georgia" pitchFamily="34" charset="-122"/>
                 <a:cs typeface="Georgia" pitchFamily="34" charset="-120"/>
               </a:rPr>
-              <a:t> Memorise the 6 names + central question of each.</a:t>
+              <a:t>*</a:t>
+            </a:r>
+            <a:pPr algn="l" indent="0" marL="0">
+              <a:lnSpc>
+                <a:spcPts val="1680"/>
+              </a:lnSpc>
+              <a:spcBef>
+                <a:spcPts val="300"/>
+              </a:spcBef>
+              <a:spcAft>
+                <a:spcPts val="300"/>
+              </a:spcAft>
+              <a:buNone/>
+            </a:pPr>
+            <a:r>
+              <a:rPr lang="en-US" sz="1200" i="1" dirty="0">
+                <a:solidFill>
+                  <a:srgbClr val="1A1A1A"/>
+                </a:solidFill>
+                <a:latin typeface="Georgia" pitchFamily="34" charset="0"/>
+                <a:ea typeface="Georgia" pitchFamily="34" charset="-122"/>
+                <a:cs typeface="Georgia" pitchFamily="34" charset="-120"/>
+              </a:rPr>
+              <a:t>Note: these are often called the</a:t>
+            </a:r>
+            <a:pPr algn="l" indent="0" marL="0">
+              <a:lnSpc>
+                <a:spcPts val="1680"/>
+              </a:lnSpc>
+              <a:spcBef>
+                <a:spcPts val="300"/>
+              </a:spcBef>
+              <a:spcAft>
+                <a:spcPts val="300"/>
+              </a:spcAft>
+              <a:buNone/>
+            </a:pPr>
+            <a:r>
+              <a:rPr lang="en-US" sz="1200" dirty="0">
+                <a:solidFill>
+                  <a:srgbClr val="1A1A1A"/>
+                </a:solidFill>
+                <a:latin typeface="Georgia" pitchFamily="34" charset="0"/>
+                <a:ea typeface="Georgia" pitchFamily="34" charset="-122"/>
+                <a:cs typeface="Georgia" pitchFamily="34" charset="-120"/>
+              </a:rPr>
+              <a:t>āstika</a:t>
+            </a:r>
+            <a:pPr algn="l" indent="0" marL="0">
+              <a:lnSpc>
+                <a:spcPts val="1680"/>
+              </a:lnSpc>
+              <a:spcBef>
+                <a:spcPts val="300"/>
+              </a:spcBef>
+              <a:spcAft>
+                <a:spcPts val="300"/>
+              </a:spcAft>
+              <a:buNone/>
+            </a:pPr>
+            <a:r>
+              <a:rPr lang="en-US" sz="1200" i="1" dirty="0">
+                <a:solidFill>
+                  <a:srgbClr val="1A1A1A"/>
+                </a:solidFill>
+                <a:latin typeface="Georgia" pitchFamily="34" charset="0"/>
+                <a:ea typeface="Georgia" pitchFamily="34" charset="-122"/>
+                <a:cs typeface="Georgia" pitchFamily="34" charset="-120"/>
+              </a:rPr>
+              <a:t> schools</a:t>
+            </a:r>
+            <a:pPr algn="l" indent="0" marL="0">
+              <a:lnSpc>
+                <a:spcPts val="1680"/>
+              </a:lnSpc>
+              <a:spcBef>
+                <a:spcPts val="300"/>
+              </a:spcBef>
+              <a:spcAft>
+                <a:spcPts val="300"/>
+              </a:spcAft>
+              <a:buNone/>
+            </a:pPr>
+            <a:r>
+              <a:rPr lang="en-US" sz="1200" i="1" dirty="0">
+                <a:solidFill>
+                  <a:srgbClr val="1A1A1A"/>
+                </a:solidFill>
+                <a:latin typeface="Georgia" pitchFamily="34" charset="0"/>
+                <a:ea typeface="Georgia" pitchFamily="34" charset="-122"/>
+                <a:cs typeface="Georgia" pitchFamily="34" charset="-120"/>
+              </a:rPr>
+              <a:t> (those that accept Vedic authority). The</a:t>
+            </a:r>
+            <a:pPr algn="l" indent="0" marL="0">
+              <a:lnSpc>
+                <a:spcPts val="1680"/>
+              </a:lnSpc>
+              <a:spcBef>
+                <a:spcPts val="300"/>
+              </a:spcBef>
+              <a:spcAft>
+                <a:spcPts val="300"/>
+              </a:spcAft>
+              <a:buNone/>
+            </a:pPr>
+            <a:r>
+              <a:rPr lang="en-US" sz="1200" dirty="0">
+                <a:solidFill>
+                  <a:srgbClr val="1A1A1A"/>
+                </a:solidFill>
+                <a:latin typeface="Georgia" pitchFamily="34" charset="0"/>
+                <a:ea typeface="Georgia" pitchFamily="34" charset="-122"/>
+                <a:cs typeface="Georgia" pitchFamily="34" charset="-120"/>
+              </a:rPr>
+              <a:t>nāstika* schools (Buddhism, Jainism, Cārvāka) developed in parallel — different intellectual traditions also "Indian," not "IKS" by the conservative definition. Be explicit about this boundary choice.</a:t>
             </a:r>
             <a:endParaRPr lang="en-US" sz="1200" dirty="0"/>
           </a:p>
@@ -4845,7 +5800,7 @@
       </p:sp>
       <p:sp>
         <p:nvSpPr>
-          <p:cNvPr id="5" name="Text 3"/>
+          <p:cNvPr id="6" name="Text 4"/>
           <p:cNvSpPr/>
           <p:nvPr/>
         </p:nvSpPr>
@@ -4995,7 +5950,7 @@
                 <a:ea typeface="Times New Roman" pitchFamily="34" charset="-122"/>
                 <a:cs typeface="Times New Roman" pitchFamily="34" charset="-120"/>
               </a:rPr>
-              <a:t>Teacher notes</a:t>
+              <a:t>Core (25 min) (cont.)</a:t>
             </a:r>
             <a:endParaRPr lang="en-US" sz="1800" dirty="0"/>
           </a:p>
@@ -5035,6 +5990,29 @@
               <a:buNone/>
             </a:pPr>
             <a:r>
+              <a:rPr lang="en-US" sz="1200" b="1" dirty="0">
+                <a:solidFill>
+                  <a:srgbClr val="1A1A1A"/>
+                </a:solidFill>
+                <a:latin typeface="Georgia" pitchFamily="34" charset="0"/>
+                <a:ea typeface="Georgia" pitchFamily="34" charset="-122"/>
+                <a:cs typeface="Georgia" pitchFamily="34" charset="-120"/>
+              </a:rPr>
+              <a:t>Sāṅkhya and Yoga as a pair</a:t>
+            </a:r>
+            <a:pPr algn="l" indent="0" marL="0">
+              <a:lnSpc>
+                <a:spcPts val="1680"/>
+              </a:lnSpc>
+              <a:spcBef>
+                <a:spcPts val="300"/>
+              </a:spcBef>
+              <a:spcAft>
+                <a:spcPts val="300"/>
+              </a:spcAft>
+              <a:buNone/>
+            </a:pPr>
+            <a:r>
               <a:rPr lang="en-US" sz="1200" dirty="0">
                 <a:solidFill>
                   <a:srgbClr val="1A1A1A"/>
@@ -5043,7 +6021,7 @@
                 <a:ea typeface="Georgia" pitchFamily="34" charset="-122"/>
                 <a:cs typeface="Georgia" pitchFamily="34" charset="-120"/>
               </a:rPr>
-              <a:t>– The "āstika vs nāstika" distinction is important. Buddhism and Jainism are ENORMOUS Indian intellectual traditions excluded from a narrow "IKS" definition. Honest scholarship acknowledges this.</a:t>
+              <a:t> — closely related; Sāṅkhya provides the metaphysics (25 tattvas — see Module 2 Senior), Yoga provides the practice. You met Sāṅkhya in Module 2 (Panchabhuta) and will meet Yoga in Module 8.</a:t>
             </a:r>
             <a:endParaRPr lang="en-US" sz="1200" dirty="0"/>
           </a:p>
@@ -5052,6 +6030,169 @@
       <p:sp>
         <p:nvSpPr>
           <p:cNvPr id="5" name="Text 3"/>
+          <p:cNvSpPr/>
+          <p:nvPr/>
+        </p:nvSpPr>
+        <p:spPr>
+          <a:xfrm>
+            <a:off x="406301" y="1373684"/>
+            <a:ext cx="8498026" cy="639812"/>
+          </a:xfrm>
+          <a:prstGeom prst="rect">
+            <a:avLst/>
+          </a:prstGeom>
+          <a:noFill/>
+          <a:ln/>
+        </p:spPr>
+        <p:txBody>
+          <a:bodyPr wrap="square" lIns="0" tIns="0" rIns="0" bIns="0" rtlCol="0" anchor="t"/>
+          <a:lstStyle/>
+          <a:p>
+            <a:pPr algn="l" indent="0" marL="0">
+              <a:lnSpc>
+                <a:spcPts val="1680"/>
+              </a:lnSpc>
+              <a:spcBef>
+                <a:spcPts val="300"/>
+              </a:spcBef>
+              <a:spcAft>
+                <a:spcPts val="300"/>
+              </a:spcAft>
+              <a:buNone/>
+            </a:pPr>
+            <a:r>
+              <a:rPr lang="en-US" sz="1200" b="1" dirty="0">
+                <a:solidFill>
+                  <a:srgbClr val="1A1A1A"/>
+                </a:solidFill>
+                <a:latin typeface="Georgia" pitchFamily="34" charset="0"/>
+                <a:ea typeface="Georgia" pitchFamily="34" charset="-122"/>
+                <a:cs typeface="Georgia" pitchFamily="34" charset="-120"/>
+              </a:rPr>
+              <a:t>Nyāya's contribution to logic.</a:t>
+            </a:r>
+            <a:pPr algn="l" indent="0" marL="0">
+              <a:lnSpc>
+                <a:spcPts val="1680"/>
+              </a:lnSpc>
+              <a:spcBef>
+                <a:spcPts val="300"/>
+              </a:spcBef>
+              <a:spcAft>
+                <a:spcPts val="300"/>
+              </a:spcAft>
+              <a:buNone/>
+            </a:pPr>
+            <a:r>
+              <a:rPr lang="en-US" sz="1200" dirty="0">
+                <a:solidFill>
+                  <a:srgbClr val="1A1A1A"/>
+                </a:solidFill>
+                <a:latin typeface="Georgia" pitchFamily="34" charset="0"/>
+                <a:ea typeface="Georgia" pitchFamily="34" charset="-122"/>
+                <a:cs typeface="Georgia" pitchFamily="34" charset="-120"/>
+              </a:rPr>
+              <a:t> The Nyāya system developed sophisticated logical analysis — formal arguments (</a:t>
+            </a:r>
+            <a:pPr algn="l" indent="0" marL="0">
+              <a:lnSpc>
+                <a:spcPts val="1680"/>
+              </a:lnSpc>
+              <a:spcBef>
+                <a:spcPts val="300"/>
+              </a:spcBef>
+              <a:spcAft>
+                <a:spcPts val="300"/>
+              </a:spcAft>
+              <a:buNone/>
+            </a:pPr>
+            <a:r>
+              <a:rPr lang="en-US" sz="1200" i="1" dirty="0">
+                <a:solidFill>
+                  <a:srgbClr val="1A1A1A"/>
+                </a:solidFill>
+                <a:latin typeface="Georgia" pitchFamily="34" charset="0"/>
+                <a:ea typeface="Georgia" pitchFamily="34" charset="-122"/>
+                <a:cs typeface="Georgia" pitchFamily="34" charset="-120"/>
+              </a:rPr>
+              <a:t>anumāna</a:t>
+            </a:r>
+            <a:pPr algn="l" indent="0" marL="0">
+              <a:lnSpc>
+                <a:spcPts val="1680"/>
+              </a:lnSpc>
+              <a:spcBef>
+                <a:spcPts val="300"/>
+              </a:spcBef>
+              <a:spcAft>
+                <a:spcPts val="300"/>
+              </a:spcAft>
+              <a:buNone/>
+            </a:pPr>
+            <a:r>
+              <a:rPr lang="en-US" sz="1200" dirty="0">
+                <a:solidFill>
+                  <a:srgbClr val="1A1A1A"/>
+                </a:solidFill>
+                <a:latin typeface="Georgia" pitchFamily="34" charset="0"/>
+                <a:ea typeface="Georgia" pitchFamily="34" charset="-122"/>
+                <a:cs typeface="Georgia" pitchFamily="34" charset="-120"/>
+              </a:rPr>
+              <a:t>), categorical syllogisms, debate procedures (</a:t>
+            </a:r>
+            <a:pPr algn="l" indent="0" marL="0">
+              <a:lnSpc>
+                <a:spcPts val="1680"/>
+              </a:lnSpc>
+              <a:spcBef>
+                <a:spcPts val="300"/>
+              </a:spcBef>
+              <a:spcAft>
+                <a:spcPts val="300"/>
+              </a:spcAft>
+              <a:buNone/>
+            </a:pPr>
+            <a:r>
+              <a:rPr lang="en-US" sz="1200" i="1" dirty="0">
+                <a:solidFill>
+                  <a:srgbClr val="1A1A1A"/>
+                </a:solidFill>
+                <a:latin typeface="Georgia" pitchFamily="34" charset="0"/>
+                <a:ea typeface="Georgia" pitchFamily="34" charset="-122"/>
+                <a:cs typeface="Georgia" pitchFamily="34" charset="-120"/>
+              </a:rPr>
+              <a:t>tarka</a:t>
+            </a:r>
+            <a:pPr algn="l" indent="0" marL="0">
+              <a:lnSpc>
+                <a:spcPts val="1680"/>
+              </a:lnSpc>
+              <a:spcBef>
+                <a:spcPts val="300"/>
+              </a:spcBef>
+              <a:spcAft>
+                <a:spcPts val="300"/>
+              </a:spcAft>
+              <a:buNone/>
+            </a:pPr>
+            <a:r>
+              <a:rPr lang="en-US" sz="1200" dirty="0">
+                <a:solidFill>
+                  <a:srgbClr val="1A1A1A"/>
+                </a:solidFill>
+                <a:latin typeface="Georgia" pitchFamily="34" charset="0"/>
+                <a:ea typeface="Georgia" pitchFamily="34" charset="-122"/>
+                <a:cs typeface="Georgia" pitchFamily="34" charset="-120"/>
+              </a:rPr>
+              <a:t>). Influenced modern logic via early-20th-c. Indian logicians (especially Bimal Krishna Matilal's work in the 1960s).</a:t>
+            </a:r>
+            <a:endParaRPr lang="en-US" sz="1200" dirty="0"/>
+          </a:p>
+        </p:txBody>
+      </p:sp>
+      <p:sp>
+        <p:nvSpPr>
+          <p:cNvPr id="6" name="Text 4"/>
           <p:cNvSpPr/>
           <p:nvPr/>
         </p:nvSpPr>
